--- a/docs/slides/ITCS6190_NYC_Taxi_Presentation.pptx
+++ b/docs/slides/ITCS6190_NYC_Taxi_Presentation.pptx
@@ -4,6 +4,9 @@
   <p:sldMasterIdLst>
     <p:sldMasterId id="2147483648" r:id="rId1"/>
   </p:sldMasterIdLst>
+  <p:notesMasterIdLst>
+    <p:notesMasterId r:id="rId11"/>
+  </p:notesMasterIdLst>
   <p:sldIdLst>
     <p:sldId id="256" r:id="rId2"/>
     <p:sldId id="257" r:id="rId3"/>
@@ -15,10 +18,7 @@
     <p:sldId id="263" r:id="rId9"/>
     <p:sldId id="264" r:id="rId10"/>
   </p:sldIdLst>
-  <p:notesMasterIdLst>
-    <p:notesMasterId r:id="rId11"/>
-  </p:notesMasterIdLst>
-  <p:sldSz cx="9144000" cy="5143500"/>
+  <p:sldSz cx="9144000" cy="5143500" type="screen16x9"/>
   <p:notesSz cx="5143500" cy="9144000"/>
   <p:defaultTextStyle>
     <a:lvl1pPr marL="0" algn="l" defTabSz="914400" rtl="0" eaLnBrk="1" latinLnBrk="0" hangingPunct="1">
@@ -112,6 +112,11 @@
       </a:defRPr>
     </a:lvl9pPr>
   </p:defaultTextStyle>
+  <p:extLst>
+    <p:ext uri="{EFAFB233-063F-42B5-8137-9DF3F51BA10A}">
+      <p15:sldGuideLst xmlns:p15="http://schemas.microsoft.com/office/powerpoint/2012/main"/>
+    </p:ext>
+  </p:extLst>
 </p:presentation>
 </file>
 
@@ -137,234 +142,10 @@
           <a:chExt cx="0" cy="0"/>
         </a:xfrm>
       </p:grpSpPr>
-      <p:sp>
-        <p:nvSpPr>
-          <p:cNvPr id="2" name="Header Placeholder 1"/>
-          <p:cNvSpPr>
-            <a:spLocks noGrp="1"/>
-          </p:cNvSpPr>
-          <p:nvPr>
-            <p:ph type="hdr" sz="quarter"/>
-          </p:nvPr>
-        </p:nvSpPr>
-        <p:spPr>
-          <a:xfrm>
-            <a:off x="0" y="0"/>
-            <a:ext cx="2971800" cy="458788"/>
-          </a:xfrm>
-          <a:prstGeom prst="rect">
-            <a:avLst/>
-          </a:prstGeom>
-        </p:spPr>
-        <p:txBody>
-          <a:bodyPr vert="horz" lIns="91440" tIns="45720" rIns="91440" bIns="45720" rtlCol="0"/>
-          <a:lstStyle>
-            <a:lvl1pPr algn="l">
-              <a:defRPr sz="1200"/>
-            </a:lvl1pPr>
-          </a:lstStyle>
-          <a:p>
-            <a:endParaRPr lang="en-US"/>
-          </a:p>
-        </p:txBody>
-      </p:sp>
-      <p:sp>
-        <p:nvSpPr>
-          <p:cNvPr id="3" name="Date Placeholder 2"/>
-          <p:cNvSpPr>
-            <a:spLocks noGrp="1"/>
-          </p:cNvSpPr>
-          <p:nvPr>
-            <p:ph type="dt" idx="1"/>
-          </p:nvPr>
-        </p:nvSpPr>
-        <p:spPr>
-          <a:xfrm>
-            <a:off x="3884613" y="0"/>
-            <a:ext cx="2971800" cy="458788"/>
-          </a:xfrm>
-          <a:prstGeom prst="rect">
-            <a:avLst/>
-          </a:prstGeom>
-        </p:spPr>
-        <p:txBody>
-          <a:bodyPr vert="horz" lIns="91440" tIns="45720" rIns="91440" bIns="45720" rtlCol="0"/>
-          <a:lstStyle>
-            <a:lvl1pPr algn="r">
-              <a:defRPr sz="1200"/>
-            </a:lvl1pPr>
-          </a:lstStyle>
-          <a:p>
-            <a:fld id="{5282F153-3F37-0F45-9E97-73ACFA13230C}" type="datetimeFigureOut">
-              <a:rPr lang="en-US"/>
-              <a:t>7/23/19</a:t>
-            </a:fld>
-            <a:endParaRPr lang="en-US"/>
-          </a:p>
-        </p:txBody>
-      </p:sp>
-      <p:sp>
-        <p:nvSpPr>
-          <p:cNvPr id="4" name="Slide Image Placeholder 3"/>
-          <p:cNvSpPr>
-            <a:spLocks noGrp="1" noRot="1" noChangeAspect="1"/>
-          </p:cNvSpPr>
-          <p:nvPr>
-            <p:ph type="sldImg" idx="2"/>
-          </p:nvPr>
-        </p:nvSpPr>
-        <p:spPr>
-          <a:xfrm>
-            <a:off x="685800" y="1143000"/>
-            <a:ext cx="5486400" cy="3086100"/>
-          </a:xfrm>
-          <a:prstGeom prst="rect">
-            <a:avLst/>
-          </a:prstGeom>
-          <a:noFill/>
-          <a:ln w="12700">
-            <a:solidFill>
-              <a:prstClr val="black"/>
-            </a:solidFill>
-          </a:ln>
-        </p:spPr>
-        <p:txBody>
-          <a:bodyPr vert="horz" lIns="91440" tIns="45720" rIns="91440" bIns="45720" rtlCol="0" anchor="ctr"/>
-          <a:lstStyle/>
-          <a:p>
-            <a:endParaRPr lang="en-US"/>
-          </a:p>
-        </p:txBody>
-      </p:sp>
-      <p:sp>
-        <p:nvSpPr>
-          <p:cNvPr id="5" name="Notes Placeholder 4"/>
-          <p:cNvSpPr>
-            <a:spLocks noGrp="1"/>
-          </p:cNvSpPr>
-          <p:nvPr>
-            <p:ph type="body" sz="quarter" idx="3"/>
-          </p:nvPr>
-        </p:nvSpPr>
-        <p:spPr>
-          <a:xfrm>
-            <a:off x="685800" y="4400550"/>
-            <a:ext cx="5486400" cy="3600450"/>
-          </a:xfrm>
-          <a:prstGeom prst="rect">
-            <a:avLst/>
-          </a:prstGeom>
-        </p:spPr>
-        <p:txBody>
-          <a:bodyPr vert="horz" lIns="91440" tIns="45720" rIns="91440" bIns="45720" rtlCol="0"/>
-          <a:lstStyle/>
-          <a:p>
-            <a:pPr lvl="0"/>
-            <a:r>
-              <a:rPr lang="en-US"/>
-              <a:t>Click to edit Master text styles</a:t>
-            </a:r>
-          </a:p>
-          <a:p>
-            <a:pPr lvl="1"/>
-            <a:r>
-              <a:rPr lang="en-US"/>
-              <a:t>Second level</a:t>
-            </a:r>
-          </a:p>
-          <a:p>
-            <a:pPr lvl="2"/>
-            <a:r>
-              <a:rPr lang="en-US"/>
-              <a:t>Third level</a:t>
-            </a:r>
-          </a:p>
-          <a:p>
-            <a:pPr lvl="3"/>
-            <a:r>
-              <a:rPr lang="en-US"/>
-              <a:t>Fourth level</a:t>
-            </a:r>
-          </a:p>
-          <a:p>
-            <a:pPr lvl="4"/>
-            <a:r>
-              <a:rPr lang="en-US"/>
-              <a:t>Fifth level</a:t>
-            </a:r>
-          </a:p>
-        </p:txBody>
-      </p:sp>
-      <p:sp>
-        <p:nvSpPr>
-          <p:cNvPr id="6" name="Footer Placeholder 5"/>
-          <p:cNvSpPr>
-            <a:spLocks noGrp="1"/>
-          </p:cNvSpPr>
-          <p:nvPr>
-            <p:ph type="ftr" sz="quarter" idx="4"/>
-          </p:nvPr>
-        </p:nvSpPr>
-        <p:spPr>
-          <a:xfrm>
-            <a:off x="0" y="8685213"/>
-            <a:ext cx="2971800" cy="458787"/>
-          </a:xfrm>
-          <a:prstGeom prst="rect">
-            <a:avLst/>
-          </a:prstGeom>
-        </p:spPr>
-        <p:txBody>
-          <a:bodyPr vert="horz" lIns="91440" tIns="45720" rIns="91440" bIns="45720" rtlCol="0" anchor="b"/>
-          <a:lstStyle>
-            <a:lvl1pPr algn="l">
-              <a:defRPr sz="1200"/>
-            </a:lvl1pPr>
-          </a:lstStyle>
-          <a:p>
-            <a:endParaRPr lang="en-US"/>
-          </a:p>
-        </p:txBody>
-      </p:sp>
-      <p:sp>
-        <p:nvSpPr>
-          <p:cNvPr id="7" name="Slide Number Placeholder 6"/>
-          <p:cNvSpPr>
-            <a:spLocks noGrp="1"/>
-          </p:cNvSpPr>
-          <p:nvPr>
-            <p:ph type="sldNum" sz="quarter" idx="5"/>
-          </p:nvPr>
-        </p:nvSpPr>
-        <p:spPr>
-          <a:xfrm>
-            <a:off x="3884613" y="8685213"/>
-            <a:ext cx="2971800" cy="458787"/>
-          </a:xfrm>
-          <a:prstGeom prst="rect">
-            <a:avLst/>
-          </a:prstGeom>
-        </p:spPr>
-        <p:txBody>
-          <a:bodyPr vert="horz" lIns="91440" tIns="45720" rIns="91440" bIns="45720" rtlCol="0" anchor="b"/>
-          <a:lstStyle>
-            <a:lvl1pPr algn="r">
-              <a:defRPr sz="1200"/>
-            </a:lvl1pPr>
-          </a:lstStyle>
-          <a:p>
-            <a:fld id="{CE5E9CC1-C706-0F49-92D6-E571CC5EEA8F}" type="slidenum">
-              <a:rPr lang="en-US"/>
-              <a:t>‹#›</a:t>
-            </a:fld>
-            <a:endParaRPr lang="en-US"/>
-          </a:p>
-        </p:txBody>
-      </p:sp>
     </p:spTree>
     <p:extLst>
       <p:ext uri="{BB962C8B-B14F-4D97-AF65-F5344CB8AC3E}">
-        <p14:creationId xmlns:p14="http://schemas.microsoft.com/office/powerpoint/2010/main" val="1024086991"/>
+        <p14:creationId xmlns:p14="http://schemas.microsoft.com/office/powerpoint/2010/main" val="3057110877"/>
       </p:ext>
     </p:extLst>
   </p:cSld>
@@ -508,10 +289,6 @@
           <a:bodyPr/>
           <a:lstStyle/>
           <a:p>
-            <a:r>
-              <a:rPr lang="en-US" dirty="0"/>
-              <a:t/>
-            </a:r>
             <a:endParaRPr lang="en-US" dirty="0"/>
           </a:p>
         </p:txBody>
@@ -596,10 +373,6 @@
           <a:bodyPr/>
           <a:lstStyle/>
           <a:p>
-            <a:r>
-              <a:rPr lang="en-US" dirty="0"/>
-              <a:t/>
-            </a:r>
             <a:endParaRPr lang="en-US" dirty="0"/>
           </a:p>
         </p:txBody>
@@ -684,10 +457,6 @@
           <a:bodyPr/>
           <a:lstStyle/>
           <a:p>
-            <a:r>
-              <a:rPr lang="en-US" dirty="0"/>
-              <a:t/>
-            </a:r>
             <a:endParaRPr lang="en-US" dirty="0"/>
           </a:p>
         </p:txBody>
@@ -772,10 +541,6 @@
           <a:bodyPr/>
           <a:lstStyle/>
           <a:p>
-            <a:r>
-              <a:rPr lang="en-US" dirty="0"/>
-              <a:t/>
-            </a:r>
             <a:endParaRPr lang="en-US" dirty="0"/>
           </a:p>
         </p:txBody>
@@ -860,10 +625,6 @@
           <a:bodyPr/>
           <a:lstStyle/>
           <a:p>
-            <a:r>
-              <a:rPr lang="en-US" dirty="0"/>
-              <a:t/>
-            </a:r>
             <a:endParaRPr lang="en-US" dirty="0"/>
           </a:p>
         </p:txBody>
@@ -948,10 +709,6 @@
           <a:bodyPr/>
           <a:lstStyle/>
           <a:p>
-            <a:r>
-              <a:rPr lang="en-US" dirty="0"/>
-              <a:t/>
-            </a:r>
             <a:endParaRPr lang="en-US" dirty="0"/>
           </a:p>
         </p:txBody>
@@ -1036,10 +793,6 @@
           <a:bodyPr/>
           <a:lstStyle/>
           <a:p>
-            <a:r>
-              <a:rPr lang="en-US" dirty="0"/>
-              <a:t/>
-            </a:r>
             <a:endParaRPr lang="en-US" dirty="0"/>
           </a:p>
         </p:txBody>
@@ -1124,10 +877,6 @@
           <a:bodyPr/>
           <a:lstStyle/>
           <a:p>
-            <a:r>
-              <a:rPr lang="en-US" dirty="0"/>
-              <a:t/>
-            </a:r>
             <a:endParaRPr lang="en-US" dirty="0"/>
           </a:p>
         </p:txBody>
@@ -1212,10 +961,6 @@
           <a:bodyPr/>
           <a:lstStyle/>
           <a:p>
-            <a:r>
-              <a:rPr lang="en-US" dirty="0"/>
-              <a:t/>
-            </a:r>
             <a:endParaRPr lang="en-US" dirty="0"/>
           </a:p>
         </p:txBody>
@@ -1289,6 +1034,11 @@
 <file path=ppt/slideMasters/slideMaster1.xml><?xml version="1.0" encoding="utf-8"?>
 <p:sldMaster xmlns:a="http://schemas.openxmlformats.org/drawingml/2006/main" xmlns:r="http://schemas.openxmlformats.org/officeDocument/2006/relationships" xmlns:p="http://schemas.openxmlformats.org/presentationml/2006/main">
   <p:cSld>
+    <p:bg>
+      <p:bgRef idx="1001">
+        <a:schemeClr val="bg1"/>
+      </p:bgRef>
+    </p:bg>
     <p:spTree>
       <p:nvGrpSpPr>
         <p:cNvPr id="1" name=""/>
@@ -1571,6 +1321,7 @@
         <a:solidFill>
           <a:srgbClr val="0B0F1A"/>
         </a:solidFill>
+        <a:effectLst/>
       </p:bgPr>
     </p:bg>
     <p:spTree>
@@ -1606,6 +1357,13 @@
           </a:solidFill>
           <a:ln/>
         </p:spPr>
+        <p:txBody>
+          <a:bodyPr/>
+          <a:lstStyle/>
+          <a:p>
+            <a:endParaRPr lang="en-US"/>
+          </a:p>
+        </p:txBody>
       </p:sp>
       <p:sp>
         <p:nvSpPr>
@@ -1628,7 +1386,7 @@
           <a:bodyPr wrap="square" rtlCol="0" anchor="ctr"/>
           <a:lstStyle/>
           <a:p>
-            <a:pPr algn="ctr" indent="0" marL="0">
+            <a:pPr marL="0" indent="0" algn="ctr">
               <a:buNone/>
             </a:pPr>
             <a:r>
@@ -1664,7 +1422,7 @@
           <a:bodyPr wrap="square" rtlCol="0" anchor="ctr"/>
           <a:lstStyle/>
           <a:p>
-            <a:pPr indent="0" marL="0">
+            <a:pPr marL="0" indent="0">
               <a:lnSpc>
                 <a:spcPct val="120000"/>
               </a:lnSpc>
@@ -1684,7 +1442,7 @@
             <a:endParaRPr lang="en-US" sz="3800" dirty="0"/>
           </a:p>
           <a:p>
-            <a:pPr indent="0" marL="0">
+            <a:pPr marL="0" indent="0">
               <a:lnSpc>
                 <a:spcPct val="120000"/>
               </a:lnSpc>
@@ -1704,7 +1462,7 @@
             <a:endParaRPr lang="en-US" sz="3800" dirty="0"/>
           </a:p>
           <a:p>
-            <a:pPr indent="0" marL="0">
+            <a:pPr marL="0" indent="0">
               <a:lnSpc>
                 <a:spcPct val="120000"/>
               </a:lnSpc>
@@ -1746,7 +1504,7 @@
           <a:bodyPr wrap="square" rtlCol="0" anchor="ctr"/>
           <a:lstStyle/>
           <a:p>
-            <a:pPr indent="0" marL="0">
+            <a:pPr marL="0" indent="0">
               <a:buNone/>
             </a:pPr>
             <a:r>
@@ -1785,7 +1543,7 @@
           <a:bodyPr wrap="square" rtlCol="0" anchor="ctr"/>
           <a:lstStyle/>
           <a:p>
-            <a:pPr indent="0" marL="0">
+            <a:pPr marL="0" indent="0">
               <a:buNone/>
             </a:pPr>
             <a:r>
@@ -1824,7 +1582,7 @@
           <a:bodyPr wrap="square" rtlCol="0" anchor="ctr"/>
           <a:lstStyle/>
           <a:p>
-            <a:pPr indent="0" marL="0">
+            <a:pPr marL="0" indent="0">
               <a:buNone/>
             </a:pPr>
             <a:r>
@@ -1858,6 +1616,7 @@
         <a:solidFill>
           <a:srgbClr val="0B0F1A"/>
         </a:solidFill>
+        <a:effectLst/>
       </p:bgPr>
     </p:bg>
     <p:spTree>
@@ -1893,6 +1652,13 @@
           </a:solidFill>
           <a:ln/>
         </p:spPr>
+        <p:txBody>
+          <a:bodyPr/>
+          <a:lstStyle/>
+          <a:p>
+            <a:endParaRPr lang="en-US"/>
+          </a:p>
+        </p:txBody>
       </p:sp>
       <p:sp>
         <p:nvSpPr>
@@ -1915,7 +1681,7 @@
           <a:bodyPr wrap="square" rtlCol="0" anchor="ctr"/>
           <a:lstStyle/>
           <a:p>
-            <a:pPr indent="0" marL="0">
+            <a:pPr marL="0" indent="0">
               <a:buNone/>
             </a:pPr>
             <a:r>
@@ -1930,45 +1696,6 @@
               <a:t>Agenda</a:t>
             </a:r>
             <a:endParaRPr lang="en-US" sz="3200" dirty="0"/>
-          </a:p>
-        </p:txBody>
-      </p:sp>
-      <p:sp>
-        <p:nvSpPr>
-          <p:cNvPr id="4" name="Text 2"/>
-          <p:cNvSpPr/>
-          <p:nvPr/>
-        </p:nvSpPr>
-        <p:spPr>
-          <a:xfrm>
-            <a:off x="256032" y="1005840"/>
-            <a:ext cx="8686800" cy="457200"/>
-          </a:xfrm>
-          <a:prstGeom prst="rect">
-            <a:avLst/>
-          </a:prstGeom>
-          <a:noFill/>
-          <a:ln/>
-        </p:spPr>
-        <p:txBody>
-          <a:bodyPr wrap="square" rtlCol="0" anchor="ctr"/>
-          <a:lstStyle/>
-          <a:p>
-            <a:pPr indent="0" marL="0">
-              <a:buNone/>
-            </a:pPr>
-            <a:r>
-              <a:rPr lang="en-US" sz="1600" dirty="0">
-                <a:solidFill>
-                  <a:srgbClr val="8899AA"/>
-                </a:solidFill>
-                <a:latin typeface="Calibri" pitchFamily="34" charset="0"/>
-                <a:ea typeface="Calibri" pitchFamily="34" charset="-122"/>
-                <a:cs typeface="Calibri" pitchFamily="34" charset="-120"/>
-              </a:rPr>
-              <a:t>What we'll cover in 5 minutes</a:t>
-            </a:r>
-            <a:endParaRPr lang="en-US" sz="1600" dirty="0"/>
           </a:p>
         </p:txBody>
       </p:sp>
@@ -1996,6 +1723,13 @@
             <a:prstDash val="solid"/>
           </a:ln>
         </p:spPr>
+        <p:txBody>
+          <a:bodyPr/>
+          <a:lstStyle/>
+          <a:p>
+            <a:endParaRPr lang="en-US"/>
+          </a:p>
+        </p:txBody>
       </p:sp>
       <p:sp>
         <p:nvSpPr>
@@ -2018,7 +1752,7 @@
           <a:bodyPr wrap="square" rtlCol="0" anchor="ctr"/>
           <a:lstStyle/>
           <a:p>
-            <a:pPr algn="ctr" indent="0" marL="0">
+            <a:pPr marL="0" indent="0" algn="ctr">
               <a:buNone/>
             </a:pPr>
             <a:r>
@@ -2057,7 +1791,7 @@
           <a:bodyPr wrap="square" rtlCol="0" anchor="ctr"/>
           <a:lstStyle/>
           <a:p>
-            <a:pPr indent="0" marL="0">
+            <a:pPr marL="0" indent="0">
               <a:buNone/>
             </a:pPr>
             <a:r>
@@ -2096,7 +1830,7 @@
           <a:bodyPr wrap="square" rtlCol="0" anchor="ctr"/>
           <a:lstStyle/>
           <a:p>
-            <a:pPr indent="0" marL="0">
+            <a:pPr marL="0" indent="0">
               <a:buNone/>
             </a:pPr>
             <a:r>
@@ -2138,6 +1872,13 @@
             <a:prstDash val="solid"/>
           </a:ln>
         </p:spPr>
+        <p:txBody>
+          <a:bodyPr/>
+          <a:lstStyle/>
+          <a:p>
+            <a:endParaRPr lang="en-US"/>
+          </a:p>
+        </p:txBody>
       </p:sp>
       <p:sp>
         <p:nvSpPr>
@@ -2160,7 +1901,7 @@
           <a:bodyPr wrap="square" rtlCol="0" anchor="ctr"/>
           <a:lstStyle/>
           <a:p>
-            <a:pPr algn="ctr" indent="0" marL="0">
+            <a:pPr marL="0" indent="0" algn="ctr">
               <a:buNone/>
             </a:pPr>
             <a:r>
@@ -2199,7 +1940,7 @@
           <a:bodyPr wrap="square" rtlCol="0" anchor="ctr"/>
           <a:lstStyle/>
           <a:p>
-            <a:pPr indent="0" marL="0">
+            <a:pPr marL="0" indent="0">
               <a:buNone/>
             </a:pPr>
             <a:r>
@@ -2238,7 +1979,7 @@
           <a:bodyPr wrap="square" rtlCol="0" anchor="ctr"/>
           <a:lstStyle/>
           <a:p>
-            <a:pPr indent="0" marL="0">
+            <a:pPr marL="0" indent="0">
               <a:buNone/>
             </a:pPr>
             <a:r>
@@ -2280,6 +2021,13 @@
             <a:prstDash val="solid"/>
           </a:ln>
         </p:spPr>
+        <p:txBody>
+          <a:bodyPr/>
+          <a:lstStyle/>
+          <a:p>
+            <a:endParaRPr lang="en-US"/>
+          </a:p>
+        </p:txBody>
       </p:sp>
       <p:sp>
         <p:nvSpPr>
@@ -2302,7 +2050,7 @@
           <a:bodyPr wrap="square" rtlCol="0" anchor="ctr"/>
           <a:lstStyle/>
           <a:p>
-            <a:pPr algn="ctr" indent="0" marL="0">
+            <a:pPr marL="0" indent="0" algn="ctr">
               <a:buNone/>
             </a:pPr>
             <a:r>
@@ -2341,7 +2089,7 @@
           <a:bodyPr wrap="square" rtlCol="0" anchor="ctr"/>
           <a:lstStyle/>
           <a:p>
-            <a:pPr indent="0" marL="0">
+            <a:pPr marL="0" indent="0">
               <a:buNone/>
             </a:pPr>
             <a:r>
@@ -2380,7 +2128,7 @@
           <a:bodyPr wrap="square" rtlCol="0" anchor="ctr"/>
           <a:lstStyle/>
           <a:p>
-            <a:pPr indent="0" marL="0">
+            <a:pPr marL="0" indent="0">
               <a:buNone/>
             </a:pPr>
             <a:r>
@@ -2422,6 +2170,13 @@
             <a:prstDash val="solid"/>
           </a:ln>
         </p:spPr>
+        <p:txBody>
+          <a:bodyPr/>
+          <a:lstStyle/>
+          <a:p>
+            <a:endParaRPr lang="en-US"/>
+          </a:p>
+        </p:txBody>
       </p:sp>
       <p:sp>
         <p:nvSpPr>
@@ -2444,7 +2199,7 @@
           <a:bodyPr wrap="square" rtlCol="0" anchor="ctr"/>
           <a:lstStyle/>
           <a:p>
-            <a:pPr algn="ctr" indent="0" marL="0">
+            <a:pPr marL="0" indent="0" algn="ctr">
               <a:buNone/>
             </a:pPr>
             <a:r>
@@ -2483,7 +2238,7 @@
           <a:bodyPr wrap="square" rtlCol="0" anchor="ctr"/>
           <a:lstStyle/>
           <a:p>
-            <a:pPr indent="0" marL="0">
+            <a:pPr marL="0" indent="0">
               <a:buNone/>
             </a:pPr>
             <a:r>
@@ -2522,7 +2277,7 @@
           <a:bodyPr wrap="square" rtlCol="0" anchor="ctr"/>
           <a:lstStyle/>
           <a:p>
-            <a:pPr indent="0" marL="0">
+            <a:pPr marL="0" indent="0">
               <a:buNone/>
             </a:pPr>
             <a:r>
@@ -2564,6 +2319,13 @@
             <a:prstDash val="solid"/>
           </a:ln>
         </p:spPr>
+        <p:txBody>
+          <a:bodyPr/>
+          <a:lstStyle/>
+          <a:p>
+            <a:endParaRPr lang="en-US"/>
+          </a:p>
+        </p:txBody>
       </p:sp>
       <p:sp>
         <p:nvSpPr>
@@ -2586,7 +2348,7 @@
           <a:bodyPr wrap="square" rtlCol="0" anchor="ctr"/>
           <a:lstStyle/>
           <a:p>
-            <a:pPr algn="ctr" indent="0" marL="0">
+            <a:pPr marL="0" indent="0" algn="ctr">
               <a:buNone/>
             </a:pPr>
             <a:r>
@@ -2625,7 +2387,7 @@
           <a:bodyPr wrap="square" rtlCol="0" anchor="ctr"/>
           <a:lstStyle/>
           <a:p>
-            <a:pPr indent="0" marL="0">
+            <a:pPr marL="0" indent="0">
               <a:buNone/>
             </a:pPr>
             <a:r>
@@ -2664,7 +2426,7 @@
           <a:bodyPr wrap="square" rtlCol="0" anchor="ctr"/>
           <a:lstStyle/>
           <a:p>
-            <a:pPr indent="0" marL="0">
+            <a:pPr marL="0" indent="0">
               <a:buNone/>
             </a:pPr>
             <a:r>
@@ -2698,6 +2460,7 @@
         <a:solidFill>
           <a:srgbClr val="0B0F1A"/>
         </a:solidFill>
+        <a:effectLst/>
       </p:bgPr>
     </p:bg>
     <p:spTree>
@@ -2733,6 +2496,13 @@
           </a:solidFill>
           <a:ln/>
         </p:spPr>
+        <p:txBody>
+          <a:bodyPr/>
+          <a:lstStyle/>
+          <a:p>
+            <a:endParaRPr lang="en-US"/>
+          </a:p>
+        </p:txBody>
       </p:sp>
       <p:sp>
         <p:nvSpPr>
@@ -2742,7 +2512,7 @@
         </p:nvSpPr>
         <p:spPr>
           <a:xfrm>
-            <a:off x="256032" y="292608"/>
+            <a:off x="292608" y="45720"/>
             <a:ext cx="8686800" cy="640080"/>
           </a:xfrm>
           <a:prstGeom prst="rect">
@@ -2755,7 +2525,7 @@
           <a:bodyPr wrap="square" rtlCol="0" anchor="ctr"/>
           <a:lstStyle/>
           <a:p>
-            <a:pPr indent="0" marL="0">
+            <a:pPr marL="0" indent="0">
               <a:buNone/>
             </a:pPr>
             <a:r>
@@ -2781,7 +2551,7 @@
         </p:nvSpPr>
         <p:spPr>
           <a:xfrm>
-            <a:off x="256032" y="1005840"/>
+            <a:off x="274320" y="523318"/>
             <a:ext cx="8686800" cy="457200"/>
           </a:xfrm>
           <a:prstGeom prst="rect">
@@ -2794,7 +2564,7 @@
           <a:bodyPr wrap="square" rtlCol="0" anchor="ctr"/>
           <a:lstStyle/>
           <a:p>
-            <a:pPr indent="0" marL="0">
+            <a:pPr marL="0" indent="0">
               <a:buNone/>
             </a:pPr>
             <a:r>
@@ -2836,6 +2606,13 @@
             <a:prstDash val="solid"/>
           </a:ln>
         </p:spPr>
+        <p:txBody>
+          <a:bodyPr/>
+          <a:lstStyle/>
+          <a:p>
+            <a:endParaRPr lang="en-US"/>
+          </a:p>
+        </p:txBody>
       </p:sp>
       <p:sp>
         <p:nvSpPr>
@@ -2861,6 +2638,13 @@
             <a:prstDash val="solid"/>
           </a:ln>
         </p:spPr>
+        <p:txBody>
+          <a:bodyPr/>
+          <a:lstStyle/>
+          <a:p>
+            <a:endParaRPr lang="en-US"/>
+          </a:p>
+        </p:txBody>
       </p:sp>
       <p:sp>
         <p:nvSpPr>
@@ -2883,7 +2667,7 @@
           <a:bodyPr wrap="square" rtlCol="0" anchor="ctr"/>
           <a:lstStyle/>
           <a:p>
-            <a:pPr indent="0" marL="0">
+            <a:pPr marL="0" indent="0">
               <a:buNone/>
             </a:pPr>
             <a:r>
@@ -2986,7 +2770,7 @@
           <a:bodyPr wrap="square" rtlCol="0" anchor="ctr"/>
           <a:lstStyle/>
           <a:p>
-            <a:pPr indent="0" marL="0">
+            <a:pPr marL="0" indent="0">
               <a:buNone/>
             </a:pPr>
             <a:r>
@@ -3025,7 +2809,7 @@
           <a:bodyPr wrap="square" rtlCol="0" anchor="ctr"/>
           <a:lstStyle/>
           <a:p>
-            <a:pPr indent="0" marL="0">
+            <a:pPr marL="0" indent="0">
               <a:buNone/>
             </a:pPr>
             <a:r>
@@ -3064,7 +2848,7 @@
           <a:bodyPr wrap="square" rtlCol="0" anchor="ctr"/>
           <a:lstStyle/>
           <a:p>
-            <a:pPr indent="0" marL="0">
+            <a:pPr marL="0" indent="0">
               <a:buNone/>
             </a:pPr>
             <a:r>
@@ -3103,7 +2887,7 @@
           <a:bodyPr wrap="square" rtlCol="0" anchor="ctr"/>
           <a:lstStyle/>
           <a:p>
-            <a:pPr indent="0" marL="0">
+            <a:pPr marL="0" indent="0">
               <a:buNone/>
             </a:pPr>
             <a:r>
@@ -3142,7 +2926,7 @@
           <a:bodyPr wrap="square" rtlCol="0" anchor="ctr"/>
           <a:lstStyle/>
           <a:p>
-            <a:pPr indent="0" marL="0">
+            <a:pPr marL="0" indent="0">
               <a:buNone/>
             </a:pPr>
             <a:r>
@@ -3181,7 +2965,7 @@
           <a:bodyPr wrap="square" rtlCol="0" anchor="ctr"/>
           <a:lstStyle/>
           <a:p>
-            <a:pPr indent="0" marL="0">
+            <a:pPr marL="0" indent="0">
               <a:buNone/>
             </a:pPr>
             <a:r>
@@ -3220,7 +3004,7 @@
           <a:bodyPr wrap="square" rtlCol="0" anchor="ctr"/>
           <a:lstStyle/>
           <a:p>
-            <a:pPr indent="0" marL="0">
+            <a:pPr marL="0" indent="0">
               <a:buNone/>
             </a:pPr>
             <a:r>
@@ -3259,7 +3043,7 @@
           <a:bodyPr wrap="square" rtlCol="0" anchor="ctr"/>
           <a:lstStyle/>
           <a:p>
-            <a:pPr indent="0" marL="0">
+            <a:pPr marL="0" indent="0">
               <a:buNone/>
             </a:pPr>
             <a:r>
@@ -3298,7 +3082,7 @@
           <a:bodyPr wrap="square" rtlCol="0" anchor="ctr"/>
           <a:lstStyle/>
           <a:p>
-            <a:pPr indent="0" marL="0">
+            <a:pPr marL="0" indent="0">
               <a:buNone/>
             </a:pPr>
             <a:r>
@@ -3337,7 +3121,7 @@
           <a:bodyPr wrap="square" rtlCol="0" anchor="ctr"/>
           <a:lstStyle/>
           <a:p>
-            <a:pPr indent="0" marL="0">
+            <a:pPr marL="0" indent="0">
               <a:buNone/>
             </a:pPr>
             <a:r>
@@ -3376,7 +3160,7 @@
           <a:bodyPr wrap="square" rtlCol="0" anchor="ctr"/>
           <a:lstStyle/>
           <a:p>
-            <a:pPr indent="0" marL="0">
+            <a:pPr marL="0" indent="0">
               <a:buNone/>
             </a:pPr>
             <a:r>
@@ -3410,6 +3194,7 @@
         <a:solidFill>
           <a:srgbClr val="0B0F1A"/>
         </a:solidFill>
+        <a:effectLst/>
       </p:bgPr>
     </p:bg>
     <p:spTree>
@@ -3445,6 +3230,13 @@
           </a:solidFill>
           <a:ln/>
         </p:spPr>
+        <p:txBody>
+          <a:bodyPr/>
+          <a:lstStyle/>
+          <a:p>
+            <a:endParaRPr lang="en-US"/>
+          </a:p>
+        </p:txBody>
       </p:sp>
       <p:sp>
         <p:nvSpPr>
@@ -3467,7 +3259,7 @@
           <a:bodyPr wrap="square" rtlCol="0" anchor="ctr"/>
           <a:lstStyle/>
           <a:p>
-            <a:pPr indent="0" marL="0">
+            <a:pPr marL="0" indent="0">
               <a:buNone/>
             </a:pPr>
             <a:r>
@@ -3506,7 +3298,7 @@
           <a:bodyPr wrap="square" rtlCol="0" anchor="ctr"/>
           <a:lstStyle/>
           <a:p>
-            <a:pPr indent="0" marL="0">
+            <a:pPr marL="0" indent="0">
               <a:buNone/>
             </a:pPr>
             <a:r>
@@ -3550,6 +3342,13 @@
             <a:prstDash val="solid"/>
           </a:ln>
         </p:spPr>
+        <p:txBody>
+          <a:bodyPr/>
+          <a:lstStyle/>
+          <a:p>
+            <a:endParaRPr lang="en-US"/>
+          </a:p>
+        </p:txBody>
       </p:sp>
       <p:sp>
         <p:nvSpPr>
@@ -3572,7 +3371,7 @@
           <a:bodyPr wrap="square" rtlCol="0" anchor="ctr"/>
           <a:lstStyle/>
           <a:p>
-            <a:pPr indent="0" marL="0">
+            <a:pPr marL="0" indent="0">
               <a:buNone/>
             </a:pPr>
             <a:r>
@@ -3611,7 +3410,7 @@
           <a:bodyPr wrap="square" rtlCol="0" anchor="ctr"/>
           <a:lstStyle/>
           <a:p>
-            <a:pPr indent="0" marL="0">
+            <a:pPr marL="0" indent="0">
               <a:buNone/>
             </a:pPr>
             <a:r>
@@ -3655,6 +3454,13 @@
             <a:prstDash val="solid"/>
           </a:ln>
         </p:spPr>
+        <p:txBody>
+          <a:bodyPr/>
+          <a:lstStyle/>
+          <a:p>
+            <a:endParaRPr lang="en-US"/>
+          </a:p>
+        </p:txBody>
       </p:sp>
       <p:sp>
         <p:nvSpPr>
@@ -3677,7 +3483,7 @@
           <a:bodyPr wrap="square" rtlCol="0" anchor="ctr"/>
           <a:lstStyle/>
           <a:p>
-            <a:pPr indent="0" marL="0">
+            <a:pPr marL="0" indent="0">
               <a:buNone/>
             </a:pPr>
             <a:r>
@@ -3716,7 +3522,7 @@
           <a:bodyPr wrap="square" rtlCol="0" anchor="ctr"/>
           <a:lstStyle/>
           <a:p>
-            <a:pPr indent="0" marL="0">
+            <a:pPr marL="0" indent="0">
               <a:buNone/>
             </a:pPr>
             <a:r>
@@ -3760,6 +3566,13 @@
             <a:prstDash val="solid"/>
           </a:ln>
         </p:spPr>
+        <p:txBody>
+          <a:bodyPr/>
+          <a:lstStyle/>
+          <a:p>
+            <a:endParaRPr lang="en-US"/>
+          </a:p>
+        </p:txBody>
       </p:sp>
       <p:sp>
         <p:nvSpPr>
@@ -3782,7 +3595,7 @@
           <a:bodyPr wrap="square" rtlCol="0" anchor="ctr"/>
           <a:lstStyle/>
           <a:p>
-            <a:pPr indent="0" marL="0">
+            <a:pPr marL="0" indent="0">
               <a:buNone/>
             </a:pPr>
             <a:r>
@@ -3821,7 +3634,7 @@
           <a:bodyPr wrap="square" rtlCol="0" anchor="ctr"/>
           <a:lstStyle/>
           <a:p>
-            <a:pPr indent="0" marL="0">
+            <a:pPr marL="0" indent="0">
               <a:buNone/>
             </a:pPr>
             <a:r>
@@ -3865,6 +3678,13 @@
             <a:prstDash val="solid"/>
           </a:ln>
         </p:spPr>
+        <p:txBody>
+          <a:bodyPr/>
+          <a:lstStyle/>
+          <a:p>
+            <a:endParaRPr lang="en-US"/>
+          </a:p>
+        </p:txBody>
       </p:sp>
       <p:sp>
         <p:nvSpPr>
@@ -3887,7 +3707,7 @@
           <a:bodyPr wrap="square" rtlCol="0" anchor="ctr"/>
           <a:lstStyle/>
           <a:p>
-            <a:pPr indent="0" marL="0">
+            <a:pPr marL="0" indent="0">
               <a:buNone/>
             </a:pPr>
             <a:r>
@@ -3926,7 +3746,7 @@
           <a:bodyPr wrap="square" rtlCol="0" anchor="ctr"/>
           <a:lstStyle/>
           <a:p>
-            <a:pPr indent="0" marL="0">
+            <a:pPr marL="0" indent="0">
               <a:buNone/>
             </a:pPr>
             <a:r>
@@ -3970,6 +3790,13 @@
             <a:prstDash val="solid"/>
           </a:ln>
         </p:spPr>
+        <p:txBody>
+          <a:bodyPr/>
+          <a:lstStyle/>
+          <a:p>
+            <a:endParaRPr lang="en-US"/>
+          </a:p>
+        </p:txBody>
       </p:sp>
       <p:sp>
         <p:nvSpPr>
@@ -3992,7 +3819,7 @@
           <a:bodyPr wrap="square" rtlCol="0" anchor="ctr"/>
           <a:lstStyle/>
           <a:p>
-            <a:pPr indent="0" marL="0">
+            <a:pPr marL="0" indent="0">
               <a:buNone/>
             </a:pPr>
             <a:r>
@@ -4031,7 +3858,7 @@
           <a:bodyPr wrap="square" rtlCol="0" anchor="ctr"/>
           <a:lstStyle/>
           <a:p>
-            <a:pPr indent="0" marL="0">
+            <a:pPr marL="0" indent="0">
               <a:buNone/>
             </a:pPr>
             <a:r>
@@ -4075,6 +3902,13 @@
             <a:prstDash val="solid"/>
           </a:ln>
         </p:spPr>
+        <p:txBody>
+          <a:bodyPr/>
+          <a:lstStyle/>
+          <a:p>
+            <a:endParaRPr lang="en-US"/>
+          </a:p>
+        </p:txBody>
       </p:sp>
       <p:sp>
         <p:nvSpPr>
@@ -4097,7 +3931,7 @@
           <a:bodyPr wrap="square" rtlCol="0" anchor="ctr"/>
           <a:lstStyle/>
           <a:p>
-            <a:pPr indent="0" marL="0">
+            <a:pPr marL="0" indent="0">
               <a:buNone/>
             </a:pPr>
             <a:r>
@@ -4136,7 +3970,7 @@
           <a:bodyPr wrap="square" rtlCol="0" anchor="ctr"/>
           <a:lstStyle/>
           <a:p>
-            <a:pPr indent="0" marL="0">
+            <a:pPr marL="0" indent="0">
               <a:buNone/>
             </a:pPr>
             <a:r>
@@ -4175,7 +4009,7 @@
           <a:bodyPr wrap="square" rtlCol="0" anchor="ctr"/>
           <a:lstStyle/>
           <a:p>
-            <a:pPr indent="0" marL="0">
+            <a:pPr marL="0" indent="0">
               <a:buNone/>
             </a:pPr>
             <a:r>
@@ -4214,7 +4048,7 @@
           <a:bodyPr wrap="square" rtlCol="0" anchor="ctr"/>
           <a:lstStyle/>
           <a:p>
-            <a:pPr indent="0" marL="0">
+            <a:pPr marL="0" indent="0">
               <a:buNone/>
             </a:pPr>
             <a:r>
@@ -4253,7 +4087,7 @@
           <a:bodyPr wrap="square" rtlCol="0" anchor="ctr"/>
           <a:lstStyle/>
           <a:p>
-            <a:pPr indent="0" marL="0">
+            <a:pPr marL="0" indent="0">
               <a:buNone/>
             </a:pPr>
             <a:r>
@@ -4292,7 +4126,7 @@
           <a:bodyPr wrap="square" rtlCol="0" anchor="ctr"/>
           <a:lstStyle/>
           <a:p>
-            <a:pPr indent="0" marL="0">
+            <a:pPr marL="0" indent="0">
               <a:buNone/>
             </a:pPr>
             <a:r>
@@ -4331,7 +4165,7 @@
           <a:bodyPr wrap="square" rtlCol="0" anchor="ctr"/>
           <a:lstStyle/>
           <a:p>
-            <a:pPr indent="0" marL="0">
+            <a:pPr marL="0" indent="0">
               <a:buNone/>
             </a:pPr>
             <a:r>
@@ -4370,7 +4204,7 @@
           <a:bodyPr wrap="square" rtlCol="0" anchor="ctr"/>
           <a:lstStyle/>
           <a:p>
-            <a:pPr indent="0" marL="0">
+            <a:pPr marL="0" indent="0">
               <a:buNone/>
             </a:pPr>
             <a:r>
@@ -4404,6 +4238,7 @@
         <a:solidFill>
           <a:srgbClr val="0B0F1A"/>
         </a:solidFill>
+        <a:effectLst/>
       </p:bgPr>
     </p:bg>
     <p:spTree>
@@ -4439,6 +4274,13 @@
           </a:solidFill>
           <a:ln/>
         </p:spPr>
+        <p:txBody>
+          <a:bodyPr/>
+          <a:lstStyle/>
+          <a:p>
+            <a:endParaRPr lang="en-US"/>
+          </a:p>
+        </p:txBody>
       </p:sp>
       <p:sp>
         <p:nvSpPr>
@@ -4461,7 +4303,7 @@
           <a:bodyPr wrap="square" rtlCol="0" anchor="ctr"/>
           <a:lstStyle/>
           <a:p>
-            <a:pPr indent="0" marL="0">
+            <a:pPr marL="0" indent="0">
               <a:buNone/>
             </a:pPr>
             <a:r>
@@ -4500,7 +4342,7 @@
           <a:bodyPr wrap="square" rtlCol="0" anchor="ctr"/>
           <a:lstStyle/>
           <a:p>
-            <a:pPr indent="0" marL="0">
+            <a:pPr marL="0" indent="0">
               <a:buNone/>
             </a:pPr>
             <a:r>
@@ -4542,6 +4384,13 @@
             <a:prstDash val="solid"/>
           </a:ln>
         </p:spPr>
+        <p:txBody>
+          <a:bodyPr/>
+          <a:lstStyle/>
+          <a:p>
+            <a:endParaRPr lang="en-US"/>
+          </a:p>
+        </p:txBody>
       </p:sp>
       <p:sp>
         <p:nvSpPr>
@@ -4564,7 +4413,7 @@
           <a:bodyPr wrap="square" rtlCol="0" anchor="ctr"/>
           <a:lstStyle/>
           <a:p>
-            <a:pPr indent="0" marL="0">
+            <a:pPr marL="0" indent="0">
               <a:buNone/>
             </a:pPr>
             <a:r>
@@ -4606,6 +4455,13 @@
             <a:prstDash val="solid"/>
           </a:ln>
         </p:spPr>
+        <p:txBody>
+          <a:bodyPr/>
+          <a:lstStyle/>
+          <a:p>
+            <a:endParaRPr lang="en-US"/>
+          </a:p>
+        </p:txBody>
       </p:sp>
       <p:sp>
         <p:nvSpPr>
@@ -4628,7 +4484,7 @@
           <a:bodyPr wrap="square" rtlCol="0" anchor="ctr"/>
           <a:lstStyle/>
           <a:p>
-            <a:pPr indent="0" marL="0">
+            <a:pPr marL="0" indent="0">
               <a:buNone/>
             </a:pPr>
             <a:r>
@@ -4670,6 +4526,13 @@
             <a:prstDash val="solid"/>
           </a:ln>
         </p:spPr>
+        <p:txBody>
+          <a:bodyPr/>
+          <a:lstStyle/>
+          <a:p>
+            <a:endParaRPr lang="en-US"/>
+          </a:p>
+        </p:txBody>
       </p:sp>
       <p:sp>
         <p:nvSpPr>
@@ -4692,7 +4555,7 @@
           <a:bodyPr wrap="square" rtlCol="0" anchor="ctr"/>
           <a:lstStyle/>
           <a:p>
-            <a:pPr indent="0" marL="0">
+            <a:pPr marL="0" indent="0">
               <a:buNone/>
             </a:pPr>
             <a:r>
@@ -4734,6 +4597,13 @@
             <a:prstDash val="solid"/>
           </a:ln>
         </p:spPr>
+        <p:txBody>
+          <a:bodyPr/>
+          <a:lstStyle/>
+          <a:p>
+            <a:endParaRPr lang="en-US"/>
+          </a:p>
+        </p:txBody>
       </p:sp>
       <p:sp>
         <p:nvSpPr>
@@ -4756,7 +4626,7 @@
           <a:bodyPr wrap="square" rtlCol="0" anchor="ctr"/>
           <a:lstStyle/>
           <a:p>
-            <a:pPr indent="0" marL="0">
+            <a:pPr marL="0" indent="0">
               <a:buNone/>
             </a:pPr>
             <a:r>
@@ -4798,6 +4668,13 @@
             <a:prstDash val="solid"/>
           </a:ln>
         </p:spPr>
+        <p:txBody>
+          <a:bodyPr/>
+          <a:lstStyle/>
+          <a:p>
+            <a:endParaRPr lang="en-US"/>
+          </a:p>
+        </p:txBody>
       </p:sp>
       <p:sp>
         <p:nvSpPr>
@@ -4820,7 +4697,7 @@
           <a:bodyPr wrap="square" rtlCol="0" anchor="ctr"/>
           <a:lstStyle/>
           <a:p>
-            <a:pPr indent="0" marL="0">
+            <a:pPr marL="0" indent="0">
               <a:buNone/>
             </a:pPr>
             <a:r>
@@ -4862,6 +4739,13 @@
             <a:prstDash val="solid"/>
           </a:ln>
         </p:spPr>
+        <p:txBody>
+          <a:bodyPr/>
+          <a:lstStyle/>
+          <a:p>
+            <a:endParaRPr lang="en-US"/>
+          </a:p>
+        </p:txBody>
       </p:sp>
       <p:sp>
         <p:nvSpPr>
@@ -4884,7 +4768,7 @@
           <a:bodyPr wrap="square" rtlCol="0" anchor="ctr"/>
           <a:lstStyle/>
           <a:p>
-            <a:pPr indent="0" marL="0">
+            <a:pPr marL="0" indent="0">
               <a:buNone/>
             </a:pPr>
             <a:r>
@@ -4926,6 +4810,13 @@
             <a:prstDash val="solid"/>
           </a:ln>
         </p:spPr>
+        <p:txBody>
+          <a:bodyPr/>
+          <a:lstStyle/>
+          <a:p>
+            <a:endParaRPr lang="en-US"/>
+          </a:p>
+        </p:txBody>
       </p:sp>
       <p:sp>
         <p:nvSpPr>
@@ -4948,7 +4839,7 @@
           <a:bodyPr wrap="square" rtlCol="0" anchor="ctr"/>
           <a:lstStyle/>
           <a:p>
-            <a:pPr indent="0" marL="0">
+            <a:pPr marL="0" indent="0">
               <a:buNone/>
             </a:pPr>
             <a:r>
@@ -4990,6 +4881,13 @@
             <a:prstDash val="solid"/>
           </a:ln>
         </p:spPr>
+        <p:txBody>
+          <a:bodyPr/>
+          <a:lstStyle/>
+          <a:p>
+            <a:endParaRPr lang="en-US"/>
+          </a:p>
+        </p:txBody>
       </p:sp>
       <p:sp>
         <p:nvSpPr>
@@ -5012,7 +4910,7 @@
           <a:bodyPr wrap="square" rtlCol="0" anchor="ctr"/>
           <a:lstStyle/>
           <a:p>
-            <a:pPr indent="0" marL="0">
+            <a:pPr marL="0" indent="0">
               <a:buNone/>
             </a:pPr>
             <a:r>
@@ -5054,6 +4952,13 @@
             <a:prstDash val="solid"/>
           </a:ln>
         </p:spPr>
+        <p:txBody>
+          <a:bodyPr/>
+          <a:lstStyle/>
+          <a:p>
+            <a:endParaRPr lang="en-US"/>
+          </a:p>
+        </p:txBody>
       </p:sp>
       <p:sp>
         <p:nvSpPr>
@@ -5076,7 +4981,7 @@
           <a:bodyPr wrap="square" rtlCol="0" anchor="ctr"/>
           <a:lstStyle/>
           <a:p>
-            <a:pPr indent="0" marL="0">
+            <a:pPr marL="0" indent="0">
               <a:buNone/>
             </a:pPr>
             <a:r>
@@ -5118,6 +5023,13 @@
             <a:prstDash val="solid"/>
           </a:ln>
         </p:spPr>
+        <p:txBody>
+          <a:bodyPr/>
+          <a:lstStyle/>
+          <a:p>
+            <a:endParaRPr lang="en-US"/>
+          </a:p>
+        </p:txBody>
       </p:sp>
       <p:sp>
         <p:nvSpPr>
@@ -5140,7 +5052,7 @@
           <a:bodyPr wrap="square" rtlCol="0" anchor="ctr"/>
           <a:lstStyle/>
           <a:p>
-            <a:pPr indent="0" marL="0">
+            <a:pPr marL="0" indent="0">
               <a:buNone/>
             </a:pPr>
             <a:r>
@@ -5182,6 +5094,13 @@
             <a:prstDash val="solid"/>
           </a:ln>
         </p:spPr>
+        <p:txBody>
+          <a:bodyPr/>
+          <a:lstStyle/>
+          <a:p>
+            <a:endParaRPr lang="en-US"/>
+          </a:p>
+        </p:txBody>
       </p:sp>
       <p:sp>
         <p:nvSpPr>
@@ -5204,7 +5123,7 @@
           <a:bodyPr wrap="square" rtlCol="0" anchor="ctr"/>
           <a:lstStyle/>
           <a:p>
-            <a:pPr indent="0" marL="0">
+            <a:pPr marL="0" indent="0">
               <a:buNone/>
             </a:pPr>
             <a:r>
@@ -5246,6 +5165,13 @@
             <a:prstDash val="solid"/>
           </a:ln>
         </p:spPr>
+        <p:txBody>
+          <a:bodyPr/>
+          <a:lstStyle/>
+          <a:p>
+            <a:endParaRPr lang="en-US"/>
+          </a:p>
+        </p:txBody>
       </p:sp>
       <p:sp>
         <p:nvSpPr>
@@ -5268,7 +5194,7 @@
           <a:bodyPr wrap="square" rtlCol="0" anchor="ctr"/>
           <a:lstStyle/>
           <a:p>
-            <a:pPr indent="0" marL="0">
+            <a:pPr marL="0" indent="0">
               <a:buNone/>
             </a:pPr>
             <a:r>
@@ -5310,6 +5236,13 @@
             <a:prstDash val="solid"/>
           </a:ln>
         </p:spPr>
+        <p:txBody>
+          <a:bodyPr/>
+          <a:lstStyle/>
+          <a:p>
+            <a:endParaRPr lang="en-US"/>
+          </a:p>
+        </p:txBody>
       </p:sp>
       <p:sp>
         <p:nvSpPr>
@@ -5332,7 +5265,7 @@
           <a:bodyPr wrap="square" rtlCol="0" anchor="ctr"/>
           <a:lstStyle/>
           <a:p>
-            <a:pPr indent="0" marL="0">
+            <a:pPr marL="0" indent="0">
               <a:buNone/>
             </a:pPr>
             <a:r>
@@ -5374,6 +5307,13 @@
             <a:prstDash val="solid"/>
           </a:ln>
         </p:spPr>
+        <p:txBody>
+          <a:bodyPr/>
+          <a:lstStyle/>
+          <a:p>
+            <a:endParaRPr lang="en-US"/>
+          </a:p>
+        </p:txBody>
       </p:sp>
       <p:sp>
         <p:nvSpPr>
@@ -5396,7 +5336,7 @@
           <a:bodyPr wrap="square" rtlCol="0" anchor="ctr"/>
           <a:lstStyle/>
           <a:p>
-            <a:pPr indent="0" marL="0">
+            <a:pPr marL="0" indent="0">
               <a:buNone/>
             </a:pPr>
             <a:r>
@@ -5438,6 +5378,13 @@
             <a:prstDash val="solid"/>
           </a:ln>
         </p:spPr>
+        <p:txBody>
+          <a:bodyPr/>
+          <a:lstStyle/>
+          <a:p>
+            <a:endParaRPr lang="en-US"/>
+          </a:p>
+        </p:txBody>
       </p:sp>
       <p:sp>
         <p:nvSpPr>
@@ -5460,7 +5407,7 @@
           <a:bodyPr wrap="square" rtlCol="0" anchor="ctr"/>
           <a:lstStyle/>
           <a:p>
-            <a:pPr indent="0" marL="0">
+            <a:pPr marL="0" indent="0">
               <a:buNone/>
             </a:pPr>
             <a:r>
@@ -5502,6 +5449,13 @@
             <a:prstDash val="solid"/>
           </a:ln>
         </p:spPr>
+        <p:txBody>
+          <a:bodyPr/>
+          <a:lstStyle/>
+          <a:p>
+            <a:endParaRPr lang="en-US"/>
+          </a:p>
+        </p:txBody>
       </p:sp>
       <p:sp>
         <p:nvSpPr>
@@ -5524,7 +5478,7 @@
           <a:bodyPr wrap="square" rtlCol="0" anchor="ctr"/>
           <a:lstStyle/>
           <a:p>
-            <a:pPr indent="0" marL="0">
+            <a:pPr marL="0" indent="0">
               <a:buNone/>
             </a:pPr>
             <a:r>
@@ -5566,6 +5520,13 @@
             <a:prstDash val="solid"/>
           </a:ln>
         </p:spPr>
+        <p:txBody>
+          <a:bodyPr/>
+          <a:lstStyle/>
+          <a:p>
+            <a:endParaRPr lang="en-US"/>
+          </a:p>
+        </p:txBody>
       </p:sp>
       <p:sp>
         <p:nvSpPr>
@@ -5588,7 +5549,7 @@
           <a:bodyPr wrap="square" rtlCol="0" anchor="ctr"/>
           <a:lstStyle/>
           <a:p>
-            <a:pPr indent="0" marL="0">
+            <a:pPr marL="0" indent="0">
               <a:buNone/>
             </a:pPr>
             <a:r>
@@ -5630,6 +5591,13 @@
             <a:prstDash val="solid"/>
           </a:ln>
         </p:spPr>
+        <p:txBody>
+          <a:bodyPr/>
+          <a:lstStyle/>
+          <a:p>
+            <a:endParaRPr lang="en-US"/>
+          </a:p>
+        </p:txBody>
       </p:sp>
       <p:sp>
         <p:nvSpPr>
@@ -5652,7 +5620,7 @@
           <a:bodyPr wrap="square" rtlCol="0" anchor="ctr"/>
           <a:lstStyle/>
           <a:p>
-            <a:pPr indent="0" marL="0">
+            <a:pPr marL="0" indent="0">
               <a:buNone/>
             </a:pPr>
             <a:r>
@@ -5694,6 +5662,13 @@
             <a:prstDash val="solid"/>
           </a:ln>
         </p:spPr>
+        <p:txBody>
+          <a:bodyPr/>
+          <a:lstStyle/>
+          <a:p>
+            <a:endParaRPr lang="en-US"/>
+          </a:p>
+        </p:txBody>
       </p:sp>
       <p:sp>
         <p:nvSpPr>
@@ -5716,7 +5691,7 @@
           <a:bodyPr wrap="square" rtlCol="0" anchor="ctr"/>
           <a:lstStyle/>
           <a:p>
-            <a:pPr indent="0" marL="0">
+            <a:pPr marL="0" indent="0">
               <a:buNone/>
             </a:pPr>
             <a:r>
@@ -5758,6 +5733,13 @@
             <a:prstDash val="solid"/>
           </a:ln>
         </p:spPr>
+        <p:txBody>
+          <a:bodyPr/>
+          <a:lstStyle/>
+          <a:p>
+            <a:endParaRPr lang="en-US"/>
+          </a:p>
+        </p:txBody>
       </p:sp>
       <p:sp>
         <p:nvSpPr>
@@ -5780,7 +5762,7 @@
           <a:bodyPr wrap="square" rtlCol="0" anchor="ctr"/>
           <a:lstStyle/>
           <a:p>
-            <a:pPr indent="0" marL="0">
+            <a:pPr marL="0" indent="0">
               <a:buNone/>
             </a:pPr>
             <a:r>
@@ -5822,6 +5804,13 @@
             <a:prstDash val="solid"/>
           </a:ln>
         </p:spPr>
+        <p:txBody>
+          <a:bodyPr/>
+          <a:lstStyle/>
+          <a:p>
+            <a:endParaRPr lang="en-US"/>
+          </a:p>
+        </p:txBody>
       </p:sp>
       <p:sp>
         <p:nvSpPr>
@@ -5844,7 +5833,7 @@
           <a:bodyPr wrap="square" rtlCol="0" anchor="ctr"/>
           <a:lstStyle/>
           <a:p>
-            <a:pPr indent="0" marL="0">
+            <a:pPr marL="0" indent="0">
               <a:buNone/>
             </a:pPr>
             <a:r>
@@ -5886,6 +5875,13 @@
             <a:prstDash val="solid"/>
           </a:ln>
         </p:spPr>
+        <p:txBody>
+          <a:bodyPr/>
+          <a:lstStyle/>
+          <a:p>
+            <a:endParaRPr lang="en-US"/>
+          </a:p>
+        </p:txBody>
       </p:sp>
       <p:sp>
         <p:nvSpPr>
@@ -5908,7 +5904,7 @@
           <a:bodyPr wrap="square" rtlCol="0" anchor="ctr"/>
           <a:lstStyle/>
           <a:p>
-            <a:pPr indent="0" marL="0">
+            <a:pPr marL="0" indent="0">
               <a:buNone/>
             </a:pPr>
             <a:r>
@@ -5950,6 +5946,13 @@
             <a:prstDash val="solid"/>
           </a:ln>
         </p:spPr>
+        <p:txBody>
+          <a:bodyPr/>
+          <a:lstStyle/>
+          <a:p>
+            <a:endParaRPr lang="en-US"/>
+          </a:p>
+        </p:txBody>
       </p:sp>
       <p:sp>
         <p:nvSpPr>
@@ -5972,7 +5975,7 @@
           <a:bodyPr wrap="square" rtlCol="0" anchor="ctr"/>
           <a:lstStyle/>
           <a:p>
-            <a:pPr indent="0" marL="0">
+            <a:pPr marL="0" indent="0">
               <a:buNone/>
             </a:pPr>
             <a:r>
@@ -6014,6 +6017,13 @@
             <a:prstDash val="solid"/>
           </a:ln>
         </p:spPr>
+        <p:txBody>
+          <a:bodyPr/>
+          <a:lstStyle/>
+          <a:p>
+            <a:endParaRPr lang="en-US"/>
+          </a:p>
+        </p:txBody>
       </p:sp>
       <p:sp>
         <p:nvSpPr>
@@ -6036,7 +6046,7 @@
           <a:bodyPr wrap="square" rtlCol="0" anchor="ctr"/>
           <a:lstStyle/>
           <a:p>
-            <a:pPr indent="0" marL="0">
+            <a:pPr marL="0" indent="0">
               <a:buNone/>
             </a:pPr>
             <a:r>
@@ -6078,6 +6088,13 @@
             <a:prstDash val="solid"/>
           </a:ln>
         </p:spPr>
+        <p:txBody>
+          <a:bodyPr/>
+          <a:lstStyle/>
+          <a:p>
+            <a:endParaRPr lang="en-US"/>
+          </a:p>
+        </p:txBody>
       </p:sp>
       <p:sp>
         <p:nvSpPr>
@@ -6100,7 +6117,7 @@
           <a:bodyPr wrap="square" rtlCol="0" anchor="ctr"/>
           <a:lstStyle/>
           <a:p>
-            <a:pPr indent="0" marL="0">
+            <a:pPr marL="0" indent="0">
               <a:buNone/>
             </a:pPr>
             <a:r>
@@ -6117,7 +6134,7 @@
             <a:endParaRPr lang="en-US" sz="1200" dirty="0"/>
           </a:p>
           <a:p>
-            <a:pPr indent="0" marL="0">
+            <a:pPr marL="0" indent="0">
               <a:buNone/>
             </a:pPr>
             <a:r>
@@ -6156,7 +6173,7 @@
           <a:bodyPr wrap="square" rtlCol="0" anchor="ctr"/>
           <a:lstStyle/>
           <a:p>
-            <a:pPr indent="0" marL="0">
+            <a:pPr marL="0" indent="0">
               <a:buNone/>
             </a:pPr>
             <a:r>
@@ -6195,7 +6212,7 @@
           <a:bodyPr wrap="square" rtlCol="0" anchor="ctr"/>
           <a:lstStyle/>
           <a:p>
-            <a:pPr indent="0" marL="0">
+            <a:pPr marL="0" indent="0">
               <a:buNone/>
             </a:pPr>
             <a:r>
@@ -6234,7 +6251,7 @@
           <a:bodyPr wrap="square" rtlCol="0" anchor="ctr"/>
           <a:lstStyle/>
           <a:p>
-            <a:pPr indent="0" marL="0">
+            <a:pPr marL="0" indent="0">
               <a:buNone/>
             </a:pPr>
             <a:r>
@@ -6273,7 +6290,7 @@
           <a:bodyPr wrap="square" rtlCol="0" anchor="ctr"/>
           <a:lstStyle/>
           <a:p>
-            <a:pPr indent="0" marL="0">
+            <a:pPr marL="0" indent="0">
               <a:buNone/>
             </a:pPr>
             <a:r>
@@ -6312,7 +6329,7 @@
           <a:bodyPr wrap="square" rtlCol="0" anchor="ctr"/>
           <a:lstStyle/>
           <a:p>
-            <a:pPr indent="0" marL="0">
+            <a:pPr marL="0" indent="0">
               <a:buNone/>
             </a:pPr>
             <a:r>
@@ -6351,7 +6368,7 @@
           <a:bodyPr wrap="square" rtlCol="0" anchor="ctr"/>
           <a:lstStyle/>
           <a:p>
-            <a:pPr indent="0" marL="0">
+            <a:pPr marL="0" indent="0">
               <a:buNone/>
             </a:pPr>
             <a:r>
@@ -6368,7 +6385,7 @@
             <a:endParaRPr lang="en-US" sz="1200" dirty="0"/>
           </a:p>
           <a:p>
-            <a:pPr indent="0" marL="0">
+            <a:pPr marL="0" indent="0">
               <a:buNone/>
             </a:pPr>
             <a:r>
@@ -6402,6 +6419,7 @@
         <a:solidFill>
           <a:srgbClr val="0B0F1A"/>
         </a:solidFill>
+        <a:effectLst/>
       </p:bgPr>
     </p:bg>
     <p:spTree>
@@ -6437,6 +6455,13 @@
           </a:solidFill>
           <a:ln/>
         </p:spPr>
+        <p:txBody>
+          <a:bodyPr/>
+          <a:lstStyle/>
+          <a:p>
+            <a:endParaRPr lang="en-US"/>
+          </a:p>
+        </p:txBody>
       </p:sp>
       <p:sp>
         <p:nvSpPr>
@@ -6446,7 +6471,7 @@
         </p:nvSpPr>
         <p:spPr>
           <a:xfrm>
-            <a:off x="256032" y="292608"/>
+            <a:off x="237744" y="18288"/>
             <a:ext cx="8686800" cy="640080"/>
           </a:xfrm>
           <a:prstGeom prst="rect">
@@ -6459,7 +6484,7 @@
           <a:bodyPr wrap="square" rtlCol="0" anchor="ctr"/>
           <a:lstStyle/>
           <a:p>
-            <a:pPr indent="0" marL="0">
+            <a:pPr marL="0" indent="0">
               <a:buNone/>
             </a:pPr>
             <a:r>
@@ -6485,7 +6510,7 @@
         </p:nvSpPr>
         <p:spPr>
           <a:xfrm>
-            <a:off x="256032" y="1005840"/>
+            <a:off x="219456" y="484632"/>
             <a:ext cx="8686800" cy="457200"/>
           </a:xfrm>
           <a:prstGeom prst="rect">
@@ -6498,7 +6523,7 @@
           <a:bodyPr wrap="square" rtlCol="0" anchor="ctr"/>
           <a:lstStyle/>
           <a:p>
-            <a:pPr indent="0" marL="0">
+            <a:pPr marL="0" indent="0">
               <a:buNone/>
             </a:pPr>
             <a:r>
@@ -6540,6 +6565,13 @@
             <a:prstDash val="solid"/>
           </a:ln>
         </p:spPr>
+        <p:txBody>
+          <a:bodyPr/>
+          <a:lstStyle/>
+          <a:p>
+            <a:endParaRPr lang="en-US"/>
+          </a:p>
+        </p:txBody>
       </p:sp>
       <p:sp>
         <p:nvSpPr>
@@ -6562,7 +6594,7 @@
           <a:bodyPr wrap="square" rtlCol="0" anchor="ctr"/>
           <a:lstStyle/>
           <a:p>
-            <a:pPr indent="0" marL="0">
+            <a:pPr marL="0" indent="0">
               <a:buNone/>
             </a:pPr>
             <a:r>
@@ -6601,7 +6633,7 @@
           <a:bodyPr wrap="square" rtlCol="0" anchor="ctr"/>
           <a:lstStyle/>
           <a:p>
-            <a:pPr indent="0" marL="0">
+            <a:pPr marL="0" indent="0">
               <a:buNone/>
             </a:pPr>
             <a:r>
@@ -6640,7 +6672,7 @@
           <a:bodyPr wrap="square" rtlCol="0" anchor="ctr"/>
           <a:lstStyle/>
           <a:p>
-            <a:pPr indent="0" marL="0">
+            <a:pPr marL="0" indent="0">
               <a:buNone/>
             </a:pPr>
             <a:r>
@@ -6679,7 +6711,7 @@
           <a:bodyPr wrap="square" rtlCol="0" anchor="ctr"/>
           <a:lstStyle/>
           <a:p>
-            <a:pPr indent="0" marL="0">
+            <a:pPr marL="0" indent="0">
               <a:buNone/>
             </a:pPr>
             <a:r>
@@ -6718,7 +6750,7 @@
           <a:bodyPr wrap="square" rtlCol="0" anchor="ctr"/>
           <a:lstStyle/>
           <a:p>
-            <a:pPr indent="0" marL="0">
+            <a:pPr marL="0" indent="0">
               <a:buNone/>
             </a:pPr>
             <a:r>
@@ -6757,7 +6789,7 @@
           <a:bodyPr wrap="square" rtlCol="0" anchor="ctr"/>
           <a:lstStyle/>
           <a:p>
-            <a:pPr indent="0" marL="0">
+            <a:pPr marL="0" indent="0">
               <a:buNone/>
             </a:pPr>
             <a:r>
@@ -6796,7 +6828,7 @@
           <a:bodyPr wrap="square" rtlCol="0" anchor="ctr"/>
           <a:lstStyle/>
           <a:p>
-            <a:pPr indent="0" marL="0">
+            <a:pPr marL="0" indent="0">
               <a:buNone/>
             </a:pPr>
             <a:r>
@@ -6835,7 +6867,7 @@
           <a:bodyPr wrap="square" rtlCol="0" anchor="ctr"/>
           <a:lstStyle/>
           <a:p>
-            <a:pPr indent="0" marL="0">
+            <a:pPr marL="0" indent="0">
               <a:buNone/>
             </a:pPr>
             <a:r>
@@ -6877,6 +6909,13 @@
             <a:prstDash val="solid"/>
           </a:ln>
         </p:spPr>
+        <p:txBody>
+          <a:bodyPr/>
+          <a:lstStyle/>
+          <a:p>
+            <a:endParaRPr lang="en-US"/>
+          </a:p>
+        </p:txBody>
       </p:sp>
       <p:sp>
         <p:nvSpPr>
@@ -6899,7 +6938,7 @@
           <a:bodyPr wrap="square" rtlCol="0" anchor="ctr"/>
           <a:lstStyle/>
           <a:p>
-            <a:pPr indent="0" marL="0">
+            <a:pPr marL="0" indent="0">
               <a:buNone/>
             </a:pPr>
             <a:r>
@@ -6938,7 +6977,7 @@
           <a:bodyPr wrap="square" rtlCol="0" anchor="ctr"/>
           <a:lstStyle/>
           <a:p>
-            <a:pPr indent="0" marL="0">
+            <a:pPr marL="0" indent="0">
               <a:buNone/>
             </a:pPr>
             <a:r>
@@ -6977,7 +7016,7 @@
           <a:bodyPr wrap="square" rtlCol="0" anchor="ctr"/>
           <a:lstStyle/>
           <a:p>
-            <a:pPr indent="0" marL="0">
+            <a:pPr marL="0" indent="0">
               <a:buNone/>
             </a:pPr>
             <a:r>
@@ -7016,7 +7055,7 @@
           <a:bodyPr wrap="square" rtlCol="0" anchor="ctr"/>
           <a:lstStyle/>
           <a:p>
-            <a:pPr indent="0" marL="0">
+            <a:pPr marL="0" indent="0">
               <a:buNone/>
             </a:pPr>
             <a:r>
@@ -7055,7 +7094,7 @@
           <a:bodyPr wrap="square" rtlCol="0" anchor="ctr"/>
           <a:lstStyle/>
           <a:p>
-            <a:pPr indent="0" marL="0">
+            <a:pPr marL="0" indent="0">
               <a:buNone/>
             </a:pPr>
             <a:r>
@@ -7094,7 +7133,7 @@
           <a:bodyPr wrap="square" rtlCol="0" anchor="ctr"/>
           <a:lstStyle/>
           <a:p>
-            <a:pPr indent="0" marL="0">
+            <a:pPr marL="0" indent="0">
               <a:buNone/>
             </a:pPr>
             <a:r>
@@ -7133,7 +7172,7 @@
           <a:bodyPr wrap="square" rtlCol="0" anchor="ctr"/>
           <a:lstStyle/>
           <a:p>
-            <a:pPr indent="0" marL="0">
+            <a:pPr marL="0" indent="0">
               <a:buNone/>
             </a:pPr>
             <a:r>
@@ -7172,7 +7211,7 @@
           <a:bodyPr wrap="square" rtlCol="0" anchor="ctr"/>
           <a:lstStyle/>
           <a:p>
-            <a:pPr indent="0" marL="0">
+            <a:pPr marL="0" indent="0">
               <a:buNone/>
             </a:pPr>
             <a:r>
@@ -7214,6 +7253,13 @@
             <a:prstDash val="solid"/>
           </a:ln>
         </p:spPr>
+        <p:txBody>
+          <a:bodyPr/>
+          <a:lstStyle/>
+          <a:p>
+            <a:endParaRPr lang="en-US"/>
+          </a:p>
+        </p:txBody>
       </p:sp>
       <p:sp>
         <p:nvSpPr>
@@ -7236,7 +7282,7 @@
           <a:bodyPr wrap="square" rtlCol="0" anchor="ctr"/>
           <a:lstStyle/>
           <a:p>
-            <a:pPr indent="0" marL="0">
+            <a:pPr marL="0" indent="0">
               <a:buNone/>
             </a:pPr>
             <a:r>
@@ -7262,8 +7308,8 @@
         </p:nvSpPr>
         <p:spPr>
           <a:xfrm>
-            <a:off x="347472" y="4434840"/>
-            <a:ext cx="999805" cy="1071220"/>
+            <a:off x="365760" y="3963695"/>
+            <a:ext cx="999805" cy="974065"/>
           </a:xfrm>
           <a:prstGeom prst="rect">
             <a:avLst/>
@@ -7278,6 +7324,13 @@
             <a:prstDash val="solid"/>
           </a:ln>
         </p:spPr>
+        <p:txBody>
+          <a:bodyPr/>
+          <a:lstStyle/>
+          <a:p>
+            <a:endParaRPr lang="en-US"/>
+          </a:p>
+        </p:txBody>
       </p:sp>
       <p:sp>
         <p:nvSpPr>
@@ -7300,7 +7353,7 @@
           <a:bodyPr wrap="square" rtlCol="0" anchor="ctr"/>
           <a:lstStyle/>
           <a:p>
-            <a:pPr indent="0" marL="0">
+            <a:pPr marL="0" indent="0">
               <a:buNone/>
             </a:pPr>
             <a:r>
@@ -7317,7 +7370,7 @@
             <a:endParaRPr lang="en-US" sz="900" dirty="0"/>
           </a:p>
           <a:p>
-            <a:pPr indent="0" marL="0">
+            <a:pPr marL="0" indent="0">
               <a:buNone/>
             </a:pPr>
             <a:r>
@@ -7343,8 +7396,8 @@
         </p:nvSpPr>
         <p:spPr>
           <a:xfrm>
-            <a:off x="2066544" y="4434840"/>
-            <a:ext cx="208666" cy="223571"/>
+            <a:off x="2103119" y="4038183"/>
+            <a:ext cx="780757" cy="411480"/>
           </a:xfrm>
           <a:prstGeom prst="rect">
             <a:avLst/>
@@ -7359,6 +7412,13 @@
             <a:prstDash val="solid"/>
           </a:ln>
         </p:spPr>
+        <p:txBody>
+          <a:bodyPr/>
+          <a:lstStyle/>
+          <a:p>
+            <a:endParaRPr lang="en-US"/>
+          </a:p>
+        </p:txBody>
       </p:sp>
       <p:sp>
         <p:nvSpPr>
@@ -7381,7 +7441,7 @@
           <a:bodyPr wrap="square" rtlCol="0" anchor="ctr"/>
           <a:lstStyle/>
           <a:p>
-            <a:pPr indent="0" marL="0">
+            <a:pPr marL="0" indent="0">
               <a:buNone/>
             </a:pPr>
             <a:r>
@@ -7398,7 +7458,7 @@
             <a:endParaRPr lang="en-US" sz="900" dirty="0"/>
           </a:p>
           <a:p>
-            <a:pPr indent="0" marL="0">
+            <a:pPr marL="0" indent="0">
               <a:buNone/>
             </a:pPr>
             <a:r>
@@ -7424,8 +7484,8 @@
         </p:nvSpPr>
         <p:spPr>
           <a:xfrm>
-            <a:off x="3785616" y="4434840"/>
-            <a:ext cx="73152" cy="64465"/>
+            <a:off x="3785615" y="4114801"/>
+            <a:ext cx="780757" cy="315926"/>
           </a:xfrm>
           <a:prstGeom prst="rect">
             <a:avLst/>
@@ -7440,6 +7500,13 @@
             <a:prstDash val="solid"/>
           </a:ln>
         </p:spPr>
+        <p:txBody>
+          <a:bodyPr/>
+          <a:lstStyle/>
+          <a:p>
+            <a:endParaRPr lang="en-US"/>
+          </a:p>
+        </p:txBody>
       </p:sp>
       <p:sp>
         <p:nvSpPr>
@@ -7462,7 +7529,7 @@
           <a:bodyPr wrap="square" rtlCol="0" anchor="ctr"/>
           <a:lstStyle/>
           <a:p>
-            <a:pPr indent="0" marL="0">
+            <a:pPr marL="0" indent="0">
               <a:buNone/>
             </a:pPr>
             <a:r>
@@ -7479,7 +7546,7 @@
             <a:endParaRPr lang="en-US" sz="900" dirty="0"/>
           </a:p>
           <a:p>
-            <a:pPr indent="0" marL="0">
+            <a:pPr marL="0" indent="0">
               <a:buNone/>
             </a:pPr>
             <a:r>
@@ -7521,6 +7588,13 @@
             <a:prstDash val="solid"/>
           </a:ln>
         </p:spPr>
+        <p:txBody>
+          <a:bodyPr/>
+          <a:lstStyle/>
+          <a:p>
+            <a:endParaRPr lang="en-US"/>
+          </a:p>
+        </p:txBody>
       </p:sp>
       <p:sp>
         <p:nvSpPr>
@@ -7543,7 +7617,7 @@
           <a:bodyPr wrap="square" rtlCol="0" anchor="ctr"/>
           <a:lstStyle/>
           <a:p>
-            <a:pPr indent="0" marL="0">
+            <a:pPr marL="0" indent="0">
               <a:buNone/>
             </a:pPr>
             <a:r>
@@ -7560,7 +7634,7 @@
             <a:endParaRPr lang="en-US" sz="900" dirty="0"/>
           </a:p>
           <a:p>
-            <a:pPr indent="0" marL="0">
+            <a:pPr marL="0" indent="0">
               <a:buNone/>
             </a:pPr>
             <a:r>
@@ -7602,6 +7676,13 @@
             <a:prstDash val="solid"/>
           </a:ln>
         </p:spPr>
+        <p:txBody>
+          <a:bodyPr/>
+          <a:lstStyle/>
+          <a:p>
+            <a:endParaRPr lang="en-US"/>
+          </a:p>
+        </p:txBody>
       </p:sp>
       <p:sp>
         <p:nvSpPr>
@@ -7624,7 +7705,7 @@
           <a:bodyPr wrap="square" rtlCol="0" anchor="ctr"/>
           <a:lstStyle/>
           <a:p>
-            <a:pPr indent="0" marL="0">
+            <a:pPr marL="0" indent="0">
               <a:buNone/>
             </a:pPr>
             <a:r>
@@ -7641,7 +7722,7 @@
             <a:endParaRPr lang="en-US" sz="900" dirty="0"/>
           </a:p>
           <a:p>
-            <a:pPr indent="0" marL="0">
+            <a:pPr marL="0" indent="0">
               <a:buNone/>
             </a:pPr>
             <a:r>
@@ -7675,6 +7756,7 @@
         <a:solidFill>
           <a:srgbClr val="0B0F1A"/>
         </a:solidFill>
+        <a:effectLst/>
       </p:bgPr>
     </p:bg>
     <p:spTree>
@@ -7710,6 +7792,13 @@
           </a:solidFill>
           <a:ln/>
         </p:spPr>
+        <p:txBody>
+          <a:bodyPr/>
+          <a:lstStyle/>
+          <a:p>
+            <a:endParaRPr lang="en-US"/>
+          </a:p>
+        </p:txBody>
       </p:sp>
       <p:sp>
         <p:nvSpPr>
@@ -7732,7 +7821,7 @@
           <a:bodyPr wrap="square" rtlCol="0" anchor="ctr"/>
           <a:lstStyle/>
           <a:p>
-            <a:pPr indent="0" marL="0">
+            <a:pPr marL="0" indent="0">
               <a:buNone/>
             </a:pPr>
             <a:r>
@@ -7758,7 +7847,7 @@
         </p:nvSpPr>
         <p:spPr>
           <a:xfrm>
-            <a:off x="256032" y="1005840"/>
+            <a:off x="256032" y="751918"/>
             <a:ext cx="8686800" cy="457200"/>
           </a:xfrm>
           <a:prstGeom prst="rect">
@@ -7771,7 +7860,7 @@
           <a:bodyPr wrap="square" rtlCol="0" anchor="ctr"/>
           <a:lstStyle/>
           <a:p>
-            <a:pPr indent="0" marL="0">
+            <a:pPr marL="0" indent="0">
               <a:buNone/>
             </a:pPr>
             <a:r>
@@ -7810,7 +7899,7 @@
           <a:bodyPr wrap="square" rtlCol="0" anchor="ctr"/>
           <a:lstStyle/>
           <a:p>
-            <a:pPr indent="0" marL="0">
+            <a:pPr marL="0" indent="0">
               <a:buNone/>
             </a:pPr>
             <a:r>
@@ -7852,6 +7941,13 @@
             <a:prstDash val="solid"/>
           </a:ln>
         </p:spPr>
+        <p:txBody>
+          <a:bodyPr/>
+          <a:lstStyle/>
+          <a:p>
+            <a:endParaRPr lang="en-US"/>
+          </a:p>
+        </p:txBody>
       </p:sp>
       <p:sp>
         <p:nvSpPr>
@@ -7874,7 +7970,7 @@
           <a:bodyPr wrap="square" rtlCol="0" anchor="ctr"/>
           <a:lstStyle/>
           <a:p>
-            <a:pPr algn="ctr" indent="0" marL="0">
+            <a:pPr marL="0" indent="0" algn="ctr">
               <a:buNone/>
             </a:pPr>
             <a:r>
@@ -7913,7 +8009,7 @@
           <a:bodyPr wrap="square" rtlCol="0" anchor="ctr"/>
           <a:lstStyle/>
           <a:p>
-            <a:pPr indent="0" marL="0">
+            <a:pPr marL="0" indent="0">
               <a:buNone/>
             </a:pPr>
             <a:r>
@@ -7952,7 +8048,7 @@
           <a:bodyPr wrap="square" rtlCol="0" anchor="ctr"/>
           <a:lstStyle/>
           <a:p>
-            <a:pPr indent="0" marL="0">
+            <a:pPr marL="0" indent="0">
               <a:buNone/>
             </a:pPr>
             <a:r>
@@ -7994,6 +8090,13 @@
             <a:prstDash val="solid"/>
           </a:ln>
         </p:spPr>
+        <p:txBody>
+          <a:bodyPr/>
+          <a:lstStyle/>
+          <a:p>
+            <a:endParaRPr lang="en-US"/>
+          </a:p>
+        </p:txBody>
       </p:sp>
       <p:sp>
         <p:nvSpPr>
@@ -8016,7 +8119,7 @@
           <a:bodyPr wrap="square" rtlCol="0" anchor="ctr"/>
           <a:lstStyle/>
           <a:p>
-            <a:pPr algn="ctr" indent="0" marL="0">
+            <a:pPr marL="0" indent="0" algn="ctr">
               <a:buNone/>
             </a:pPr>
             <a:r>
@@ -8055,7 +8158,7 @@
           <a:bodyPr wrap="square" rtlCol="0" anchor="ctr"/>
           <a:lstStyle/>
           <a:p>
-            <a:pPr indent="0" marL="0">
+            <a:pPr marL="0" indent="0">
               <a:buNone/>
             </a:pPr>
             <a:r>
@@ -8094,7 +8197,7 @@
           <a:bodyPr wrap="square" rtlCol="0" anchor="ctr"/>
           <a:lstStyle/>
           <a:p>
-            <a:pPr indent="0" marL="0">
+            <a:pPr marL="0" indent="0">
               <a:buNone/>
             </a:pPr>
             <a:r>
@@ -8136,6 +8239,13 @@
             <a:prstDash val="solid"/>
           </a:ln>
         </p:spPr>
+        <p:txBody>
+          <a:bodyPr/>
+          <a:lstStyle/>
+          <a:p>
+            <a:endParaRPr lang="en-US"/>
+          </a:p>
+        </p:txBody>
       </p:sp>
       <p:sp>
         <p:nvSpPr>
@@ -8158,7 +8268,7 @@
           <a:bodyPr wrap="square" rtlCol="0" anchor="ctr"/>
           <a:lstStyle/>
           <a:p>
-            <a:pPr algn="ctr" indent="0" marL="0">
+            <a:pPr marL="0" indent="0" algn="ctr">
               <a:buNone/>
             </a:pPr>
             <a:r>
@@ -8197,7 +8307,7 @@
           <a:bodyPr wrap="square" rtlCol="0" anchor="ctr"/>
           <a:lstStyle/>
           <a:p>
-            <a:pPr indent="0" marL="0">
+            <a:pPr marL="0" indent="0">
               <a:buNone/>
             </a:pPr>
             <a:r>
@@ -8236,7 +8346,7 @@
           <a:bodyPr wrap="square" rtlCol="0" anchor="ctr"/>
           <a:lstStyle/>
           <a:p>
-            <a:pPr indent="0" marL="0">
+            <a:pPr marL="0" indent="0">
               <a:buNone/>
             </a:pPr>
             <a:r>
@@ -8278,6 +8388,13 @@
             <a:prstDash val="solid"/>
           </a:ln>
         </p:spPr>
+        <p:txBody>
+          <a:bodyPr/>
+          <a:lstStyle/>
+          <a:p>
+            <a:endParaRPr lang="en-US"/>
+          </a:p>
+        </p:txBody>
       </p:sp>
       <p:sp>
         <p:nvSpPr>
@@ -8300,7 +8417,7 @@
           <a:bodyPr wrap="square" rtlCol="0" anchor="ctr"/>
           <a:lstStyle/>
           <a:p>
-            <a:pPr algn="ctr" indent="0" marL="0">
+            <a:pPr marL="0" indent="0" algn="ctr">
               <a:buNone/>
             </a:pPr>
             <a:r>
@@ -8339,7 +8456,7 @@
           <a:bodyPr wrap="square" rtlCol="0" anchor="ctr"/>
           <a:lstStyle/>
           <a:p>
-            <a:pPr indent="0" marL="0">
+            <a:pPr marL="0" indent="0">
               <a:buNone/>
             </a:pPr>
             <a:r>
@@ -8378,7 +8495,7 @@
           <a:bodyPr wrap="square" rtlCol="0" anchor="ctr"/>
           <a:lstStyle/>
           <a:p>
-            <a:pPr indent="0" marL="0">
+            <a:pPr marL="0" indent="0">
               <a:buNone/>
             </a:pPr>
             <a:r>
@@ -8420,6 +8537,13 @@
             <a:prstDash val="solid"/>
           </a:ln>
         </p:spPr>
+        <p:txBody>
+          <a:bodyPr/>
+          <a:lstStyle/>
+          <a:p>
+            <a:endParaRPr lang="en-US"/>
+          </a:p>
+        </p:txBody>
       </p:sp>
       <p:sp>
         <p:nvSpPr>
@@ -8442,7 +8566,7 @@
           <a:bodyPr wrap="square" rtlCol="0" anchor="ctr"/>
           <a:lstStyle/>
           <a:p>
-            <a:pPr algn="ctr" indent="0" marL="0">
+            <a:pPr marL="0" indent="0" algn="ctr">
               <a:buNone/>
             </a:pPr>
             <a:r>
@@ -8481,7 +8605,7 @@
           <a:bodyPr wrap="square" rtlCol="0" anchor="ctr"/>
           <a:lstStyle/>
           <a:p>
-            <a:pPr indent="0" marL="0">
+            <a:pPr marL="0" indent="0">
               <a:buNone/>
             </a:pPr>
             <a:r>
@@ -8520,7 +8644,7 @@
           <a:bodyPr wrap="square" rtlCol="0" anchor="ctr"/>
           <a:lstStyle/>
           <a:p>
-            <a:pPr indent="0" marL="0">
+            <a:pPr marL="0" indent="0">
               <a:buNone/>
             </a:pPr>
             <a:r>
@@ -8559,7 +8683,7 @@
           <a:bodyPr wrap="square" rtlCol="0" anchor="ctr"/>
           <a:lstStyle/>
           <a:p>
-            <a:pPr indent="0" marL="0">
+            <a:pPr marL="0" indent="0">
               <a:buNone/>
             </a:pPr>
             <a:r>
@@ -8593,6 +8717,7 @@
         <a:solidFill>
           <a:srgbClr val="0B0F1A"/>
         </a:solidFill>
+        <a:effectLst/>
       </p:bgPr>
     </p:bg>
     <p:spTree>
@@ -8628,6 +8753,13 @@
           </a:solidFill>
           <a:ln/>
         </p:spPr>
+        <p:txBody>
+          <a:bodyPr/>
+          <a:lstStyle/>
+          <a:p>
+            <a:endParaRPr lang="en-US"/>
+          </a:p>
+        </p:txBody>
       </p:sp>
       <p:sp>
         <p:nvSpPr>
@@ -8650,7 +8782,7 @@
           <a:bodyPr wrap="square" rtlCol="0" anchor="ctr"/>
           <a:lstStyle/>
           <a:p>
-            <a:pPr indent="0" marL="0">
+            <a:pPr marL="0" indent="0">
               <a:buNone/>
             </a:pPr>
             <a:r>
@@ -8692,6 +8824,13 @@
             <a:prstDash val="solid"/>
           </a:ln>
         </p:spPr>
+        <p:txBody>
+          <a:bodyPr/>
+          <a:lstStyle/>
+          <a:p>
+            <a:endParaRPr lang="en-US"/>
+          </a:p>
+        </p:txBody>
       </p:sp>
       <p:sp>
         <p:nvSpPr>
@@ -8714,7 +8853,7 @@
           <a:bodyPr wrap="square" rtlCol="0" anchor="ctr"/>
           <a:lstStyle/>
           <a:p>
-            <a:pPr indent="0" marL="0">
+            <a:pPr marL="0" indent="0">
               <a:buNone/>
             </a:pPr>
             <a:r>
@@ -8750,7 +8889,7 @@
           <a:bodyPr wrap="square" rtlCol="0" anchor="ctr"/>
           <a:lstStyle/>
           <a:p>
-            <a:pPr indent="0" marL="0">
+            <a:pPr marL="0" indent="0">
               <a:buNone/>
             </a:pPr>
             <a:r>
@@ -8789,7 +8928,7 @@
           <a:bodyPr wrap="square" rtlCol="0" anchor="ctr"/>
           <a:lstStyle/>
           <a:p>
-            <a:pPr indent="0" marL="0">
+            <a:pPr marL="0" indent="0">
               <a:lnSpc>
                 <a:spcPct val="125000"/>
               </a:lnSpc>
@@ -8834,6 +8973,13 @@
             <a:prstDash val="solid"/>
           </a:ln>
         </p:spPr>
+        <p:txBody>
+          <a:bodyPr/>
+          <a:lstStyle/>
+          <a:p>
+            <a:endParaRPr lang="en-US"/>
+          </a:p>
+        </p:txBody>
       </p:sp>
       <p:sp>
         <p:nvSpPr>
@@ -8856,7 +9002,7 @@
           <a:bodyPr wrap="square" rtlCol="0" anchor="ctr"/>
           <a:lstStyle/>
           <a:p>
-            <a:pPr indent="0" marL="0">
+            <a:pPr marL="0" indent="0">
               <a:buNone/>
             </a:pPr>
             <a:r>
@@ -8892,7 +9038,7 @@
           <a:bodyPr wrap="square" rtlCol="0" anchor="ctr"/>
           <a:lstStyle/>
           <a:p>
-            <a:pPr indent="0" marL="0">
+            <a:pPr marL="0" indent="0">
               <a:buNone/>
             </a:pPr>
             <a:r>
@@ -8931,7 +9077,7 @@
           <a:bodyPr wrap="square" rtlCol="0" anchor="ctr"/>
           <a:lstStyle/>
           <a:p>
-            <a:pPr indent="0" marL="0">
+            <a:pPr marL="0" indent="0">
               <a:lnSpc>
                 <a:spcPct val="125000"/>
               </a:lnSpc>
@@ -8976,6 +9122,13 @@
             <a:prstDash val="solid"/>
           </a:ln>
         </p:spPr>
+        <p:txBody>
+          <a:bodyPr/>
+          <a:lstStyle/>
+          <a:p>
+            <a:endParaRPr lang="en-US"/>
+          </a:p>
+        </p:txBody>
       </p:sp>
       <p:sp>
         <p:nvSpPr>
@@ -8998,7 +9151,7 @@
           <a:bodyPr wrap="square" rtlCol="0" anchor="ctr"/>
           <a:lstStyle/>
           <a:p>
-            <a:pPr indent="0" marL="0">
+            <a:pPr marL="0" indent="0">
               <a:buNone/>
             </a:pPr>
             <a:r>
@@ -9034,7 +9187,7 @@
           <a:bodyPr wrap="square" rtlCol="0" anchor="ctr"/>
           <a:lstStyle/>
           <a:p>
-            <a:pPr indent="0" marL="0">
+            <a:pPr marL="0" indent="0">
               <a:buNone/>
             </a:pPr>
             <a:r>
@@ -9073,7 +9226,7 @@
           <a:bodyPr wrap="square" rtlCol="0" anchor="ctr"/>
           <a:lstStyle/>
           <a:p>
-            <a:pPr indent="0" marL="0">
+            <a:pPr marL="0" indent="0">
               <a:lnSpc>
                 <a:spcPct val="125000"/>
               </a:lnSpc>
@@ -9118,6 +9271,13 @@
             <a:prstDash val="solid"/>
           </a:ln>
         </p:spPr>
+        <p:txBody>
+          <a:bodyPr/>
+          <a:lstStyle/>
+          <a:p>
+            <a:endParaRPr lang="en-US"/>
+          </a:p>
+        </p:txBody>
       </p:sp>
       <p:sp>
         <p:nvSpPr>
@@ -9140,7 +9300,7 @@
           <a:bodyPr wrap="square" rtlCol="0" anchor="ctr"/>
           <a:lstStyle/>
           <a:p>
-            <a:pPr indent="0" marL="0">
+            <a:pPr marL="0" indent="0">
               <a:buNone/>
             </a:pPr>
             <a:r>
@@ -9176,7 +9336,7 @@
           <a:bodyPr wrap="square" rtlCol="0" anchor="ctr"/>
           <a:lstStyle/>
           <a:p>
-            <a:pPr indent="0" marL="0">
+            <a:pPr marL="0" indent="0">
               <a:buNone/>
             </a:pPr>
             <a:r>
@@ -9215,7 +9375,7 @@
           <a:bodyPr wrap="square" rtlCol="0" anchor="ctr"/>
           <a:lstStyle/>
           <a:p>
-            <a:pPr indent="0" marL="0">
+            <a:pPr marL="0" indent="0">
               <a:lnSpc>
                 <a:spcPct val="125000"/>
               </a:lnSpc>
@@ -9257,7 +9417,7 @@
           <a:bodyPr wrap="square" rtlCol="0" anchor="ctr"/>
           <a:lstStyle/>
           <a:p>
-            <a:pPr indent="0" marL="0">
+            <a:pPr marL="0" indent="0">
               <a:buNone/>
             </a:pPr>
             <a:r>
@@ -9291,6 +9451,7 @@
         <a:solidFill>
           <a:srgbClr val="0B0F1A"/>
         </a:solidFill>
+        <a:effectLst/>
       </p:bgPr>
     </p:bg>
     <p:spTree>
@@ -9326,6 +9487,13 @@
           </a:solidFill>
           <a:ln/>
         </p:spPr>
+        <p:txBody>
+          <a:bodyPr/>
+          <a:lstStyle/>
+          <a:p>
+            <a:endParaRPr lang="en-US"/>
+          </a:p>
+        </p:txBody>
       </p:sp>
       <p:sp>
         <p:nvSpPr>
@@ -9346,6 +9514,13 @@
           </a:solidFill>
           <a:ln/>
         </p:spPr>
+        <p:txBody>
+          <a:bodyPr/>
+          <a:lstStyle/>
+          <a:p>
+            <a:endParaRPr lang="en-US"/>
+          </a:p>
+        </p:txBody>
       </p:sp>
       <p:sp>
         <p:nvSpPr>
@@ -9368,7 +9543,7 @@
           <a:bodyPr wrap="square" rtlCol="0" anchor="ctr"/>
           <a:lstStyle/>
           <a:p>
-            <a:pPr algn="ctr" indent="0" marL="0">
+            <a:pPr marL="0" indent="0" algn="ctr">
               <a:buNone/>
             </a:pPr>
             <a:r>
@@ -9404,7 +9579,7 @@
           <a:bodyPr wrap="square" rtlCol="0" anchor="ctr"/>
           <a:lstStyle/>
           <a:p>
-            <a:pPr indent="0" marL="0">
+            <a:pPr marL="0" indent="0">
               <a:buNone/>
             </a:pPr>
             <a:r>
@@ -9443,7 +9618,7 @@
           <a:bodyPr wrap="square" rtlCol="0" anchor="ctr"/>
           <a:lstStyle/>
           <a:p>
-            <a:pPr indent="0" marL="0">
+            <a:pPr marL="0" indent="0">
               <a:buNone/>
             </a:pPr>
             <a:r>
@@ -9482,7 +9657,7 @@
           <a:bodyPr wrap="square" rtlCol="0" anchor="ctr"/>
           <a:lstStyle/>
           <a:p>
-            <a:pPr indent="0" marL="0">
+            <a:pPr marL="0" indent="0">
               <a:lnSpc>
                 <a:spcPct val="150000"/>
               </a:lnSpc>
@@ -9502,7 +9677,7 @@
             <a:endParaRPr lang="en-US" sz="1200" dirty="0"/>
           </a:p>
           <a:p>
-            <a:pPr indent="0" marL="0">
+            <a:pPr marL="0" indent="0">
               <a:lnSpc>
                 <a:spcPct val="150000"/>
               </a:lnSpc>
@@ -9522,7 +9697,7 @@
             <a:endParaRPr lang="en-US" sz="1200" dirty="0"/>
           </a:p>
           <a:p>
-            <a:pPr indent="0" marL="0">
+            <a:pPr marL="0" indent="0">
               <a:lnSpc>
                 <a:spcPct val="150000"/>
               </a:lnSpc>
@@ -9564,7 +9739,7 @@
           <a:bodyPr wrap="square" rtlCol="0" anchor="ctr"/>
           <a:lstStyle/>
           <a:p>
-            <a:pPr indent="0" marL="0">
+            <a:pPr marL="0" indent="0">
               <a:buNone/>
             </a:pPr>
             <a:r>
@@ -9581,7 +9756,7 @@
             <a:endParaRPr lang="en-US" sz="1100" dirty="0"/>
           </a:p>
           <a:p>
-            <a:pPr indent="0" marL="0">
+            <a:pPr marL="0" indent="0">
               <a:buNone/>
             </a:pPr>
             <a:r>
@@ -9900,4 +10075,319 @@
     </a:ext>
   </a:extLst>
 </a:theme>
+</file>
+
+<file path=ppt/theme/theme2.xml><?xml version="1.0" encoding="utf-8"?>
+<a:theme xmlns:a="http://schemas.openxmlformats.org/drawingml/2006/main" name="Office Theme">
+  <a:themeElements>
+    <a:clrScheme name="Office">
+      <a:dk1>
+        <a:sysClr val="windowText" lastClr="000000"/>
+      </a:dk1>
+      <a:lt1>
+        <a:sysClr val="window" lastClr="FFFFFF"/>
+      </a:lt1>
+      <a:dk2>
+        <a:srgbClr val="0E2841"/>
+      </a:dk2>
+      <a:lt2>
+        <a:srgbClr val="E8E8E8"/>
+      </a:lt2>
+      <a:accent1>
+        <a:srgbClr val="156082"/>
+      </a:accent1>
+      <a:accent2>
+        <a:srgbClr val="E97132"/>
+      </a:accent2>
+      <a:accent3>
+        <a:srgbClr val="196B24"/>
+      </a:accent3>
+      <a:accent4>
+        <a:srgbClr val="0F9ED5"/>
+      </a:accent4>
+      <a:accent5>
+        <a:srgbClr val="A02B93"/>
+      </a:accent5>
+      <a:accent6>
+        <a:srgbClr val="4EA72E"/>
+      </a:accent6>
+      <a:hlink>
+        <a:srgbClr val="467886"/>
+      </a:hlink>
+      <a:folHlink>
+        <a:srgbClr val="96607D"/>
+      </a:folHlink>
+    </a:clrScheme>
+    <a:fontScheme name="Office">
+      <a:majorFont>
+        <a:latin typeface="Aptos Display" panose="02110004020202020204"/>
+        <a:ea typeface=""/>
+        <a:cs typeface=""/>
+        <a:font script="Jpan" typeface="游ゴシック Light"/>
+        <a:font script="Hang" typeface="맑은 고딕"/>
+        <a:font script="Hans" typeface="等线 Light"/>
+        <a:font script="Hant" typeface="新細明體"/>
+        <a:font script="Arab" typeface="Times New Roman"/>
+        <a:font script="Hebr" typeface="Times New Roman"/>
+        <a:font script="Thai" typeface="Angsana New"/>
+        <a:font script="Ethi" typeface="Nyala"/>
+        <a:font script="Beng" typeface="Vrinda"/>
+        <a:font script="Gujr" typeface="Shruti"/>
+        <a:font script="Khmr" typeface="MoolBoran"/>
+        <a:font script="Knda" typeface="Tunga"/>
+        <a:font script="Guru" typeface="Raavi"/>
+        <a:font script="Cans" typeface="Euphemia"/>
+        <a:font script="Cher" typeface="Plantagenet Cherokee"/>
+        <a:font script="Yiii" typeface="Microsoft Yi Baiti"/>
+        <a:font script="Tibt" typeface="Microsoft Himalaya"/>
+        <a:font script="Thaa" typeface="MV Boli"/>
+        <a:font script="Deva" typeface="Mangal"/>
+        <a:font script="Telu" typeface="Gautami"/>
+        <a:font script="Taml" typeface="Latha"/>
+        <a:font script="Syrc" typeface="Estrangelo Edessa"/>
+        <a:font script="Orya" typeface="Kalinga"/>
+        <a:font script="Mlym" typeface="Kartika"/>
+        <a:font script="Laoo" typeface="DokChampa"/>
+        <a:font script="Sinh" typeface="Iskoola Pota"/>
+        <a:font script="Mong" typeface="Mongolian Baiti"/>
+        <a:font script="Viet" typeface="Times New Roman"/>
+        <a:font script="Uigh" typeface="Microsoft Uighur"/>
+        <a:font script="Geor" typeface="Sylfaen"/>
+        <a:font script="Armn" typeface="Arial"/>
+        <a:font script="Bugi" typeface="Leelawadee UI"/>
+        <a:font script="Bopo" typeface="Microsoft JhengHei"/>
+        <a:font script="Java" typeface="Javanese Text"/>
+        <a:font script="Lisu" typeface="Segoe UI"/>
+        <a:font script="Mymr" typeface="Myanmar Text"/>
+        <a:font script="Nkoo" typeface="Ebrima"/>
+        <a:font script="Olck" typeface="Nirmala UI"/>
+        <a:font script="Osma" typeface="Ebrima"/>
+        <a:font script="Phag" typeface="Phagspa"/>
+        <a:font script="Syrn" typeface="Estrangelo Edessa"/>
+        <a:font script="Syrj" typeface="Estrangelo Edessa"/>
+        <a:font script="Syre" typeface="Estrangelo Edessa"/>
+        <a:font script="Sora" typeface="Nirmala UI"/>
+        <a:font script="Tale" typeface="Microsoft Tai Le"/>
+        <a:font script="Talu" typeface="Microsoft New Tai Lue"/>
+        <a:font script="Tfng" typeface="Ebrima"/>
+      </a:majorFont>
+      <a:minorFont>
+        <a:latin typeface="Aptos" panose="02110004020202020204"/>
+        <a:ea typeface=""/>
+        <a:cs typeface=""/>
+        <a:font script="Jpan" typeface="游ゴシック"/>
+        <a:font script="Hang" typeface="맑은 고딕"/>
+        <a:font script="Hans" typeface="等线"/>
+        <a:font script="Hant" typeface="新細明體"/>
+        <a:font script="Arab" typeface="Arial"/>
+        <a:font script="Hebr" typeface="Arial"/>
+        <a:font script="Thai" typeface="Cordia New"/>
+        <a:font script="Ethi" typeface="Nyala"/>
+        <a:font script="Beng" typeface="Vrinda"/>
+        <a:font script="Gujr" typeface="Shruti"/>
+        <a:font script="Khmr" typeface="DaunPenh"/>
+        <a:font script="Knda" typeface="Tunga"/>
+        <a:font script="Guru" typeface="Raavi"/>
+        <a:font script="Cans" typeface="Euphemia"/>
+        <a:font script="Cher" typeface="Plantagenet Cherokee"/>
+        <a:font script="Yiii" typeface="Microsoft Yi Baiti"/>
+        <a:font script="Tibt" typeface="Microsoft Himalaya"/>
+        <a:font script="Thaa" typeface="MV Boli"/>
+        <a:font script="Deva" typeface="Mangal"/>
+        <a:font script="Telu" typeface="Gautami"/>
+        <a:font script="Taml" typeface="Latha"/>
+        <a:font script="Syrc" typeface="Estrangelo Edessa"/>
+        <a:font script="Orya" typeface="Kalinga"/>
+        <a:font script="Mlym" typeface="Kartika"/>
+        <a:font script="Laoo" typeface="DokChampa"/>
+        <a:font script="Sinh" typeface="Iskoola Pota"/>
+        <a:font script="Mong" typeface="Mongolian Baiti"/>
+        <a:font script="Viet" typeface="Arial"/>
+        <a:font script="Uigh" typeface="Microsoft Uighur"/>
+        <a:font script="Geor" typeface="Sylfaen"/>
+        <a:font script="Armn" typeface="Arial"/>
+        <a:font script="Bugi" typeface="Leelawadee UI"/>
+        <a:font script="Bopo" typeface="Microsoft JhengHei"/>
+        <a:font script="Java" typeface="Javanese Text"/>
+        <a:font script="Lisu" typeface="Segoe UI"/>
+        <a:font script="Mymr" typeface="Myanmar Text"/>
+        <a:font script="Nkoo" typeface="Ebrima"/>
+        <a:font script="Olck" typeface="Nirmala UI"/>
+        <a:font script="Osma" typeface="Ebrima"/>
+        <a:font script="Phag" typeface="Phagspa"/>
+        <a:font script="Syrn" typeface="Estrangelo Edessa"/>
+        <a:font script="Syrj" typeface="Estrangelo Edessa"/>
+        <a:font script="Syre" typeface="Estrangelo Edessa"/>
+        <a:font script="Sora" typeface="Nirmala UI"/>
+        <a:font script="Tale" typeface="Microsoft Tai Le"/>
+        <a:font script="Talu" typeface="Microsoft New Tai Lue"/>
+        <a:font script="Tfng" typeface="Ebrima"/>
+      </a:minorFont>
+    </a:fontScheme>
+    <a:fmtScheme name="Office">
+      <a:fillStyleLst>
+        <a:solidFill>
+          <a:schemeClr val="phClr"/>
+        </a:solidFill>
+        <a:gradFill rotWithShape="1">
+          <a:gsLst>
+            <a:gs pos="0">
+              <a:schemeClr val="phClr">
+                <a:lumMod val="110000"/>
+                <a:satMod val="105000"/>
+                <a:tint val="67000"/>
+              </a:schemeClr>
+            </a:gs>
+            <a:gs pos="50000">
+              <a:schemeClr val="phClr">
+                <a:lumMod val="105000"/>
+                <a:satMod val="103000"/>
+                <a:tint val="73000"/>
+              </a:schemeClr>
+            </a:gs>
+            <a:gs pos="100000">
+              <a:schemeClr val="phClr">
+                <a:lumMod val="105000"/>
+                <a:satMod val="109000"/>
+                <a:tint val="81000"/>
+              </a:schemeClr>
+            </a:gs>
+          </a:gsLst>
+          <a:lin ang="5400000" scaled="0"/>
+        </a:gradFill>
+        <a:gradFill rotWithShape="1">
+          <a:gsLst>
+            <a:gs pos="0">
+              <a:schemeClr val="phClr">
+                <a:satMod val="103000"/>
+                <a:lumMod val="102000"/>
+                <a:tint val="94000"/>
+              </a:schemeClr>
+            </a:gs>
+            <a:gs pos="50000">
+              <a:schemeClr val="phClr">
+                <a:satMod val="110000"/>
+                <a:lumMod val="100000"/>
+                <a:shade val="100000"/>
+              </a:schemeClr>
+            </a:gs>
+            <a:gs pos="100000">
+              <a:schemeClr val="phClr">
+                <a:lumMod val="99000"/>
+                <a:satMod val="120000"/>
+                <a:shade val="78000"/>
+              </a:schemeClr>
+            </a:gs>
+          </a:gsLst>
+          <a:lin ang="5400000" scaled="0"/>
+        </a:gradFill>
+      </a:fillStyleLst>
+      <a:lnStyleLst>
+        <a:ln w="12700" cap="flat" cmpd="sng" algn="ctr">
+          <a:solidFill>
+            <a:schemeClr val="phClr"/>
+          </a:solidFill>
+          <a:prstDash val="solid"/>
+          <a:miter lim="800000"/>
+        </a:ln>
+        <a:ln w="19050" cap="flat" cmpd="sng" algn="ctr">
+          <a:solidFill>
+            <a:schemeClr val="phClr"/>
+          </a:solidFill>
+          <a:prstDash val="solid"/>
+          <a:miter lim="800000"/>
+        </a:ln>
+        <a:ln w="25400" cap="flat" cmpd="sng" algn="ctr">
+          <a:solidFill>
+            <a:schemeClr val="phClr"/>
+          </a:solidFill>
+          <a:prstDash val="solid"/>
+          <a:miter lim="800000"/>
+        </a:ln>
+      </a:lnStyleLst>
+      <a:effectStyleLst>
+        <a:effectStyle>
+          <a:effectLst/>
+        </a:effectStyle>
+        <a:effectStyle>
+          <a:effectLst/>
+        </a:effectStyle>
+        <a:effectStyle>
+          <a:effectLst>
+            <a:outerShdw blurRad="57150" dist="19050" dir="5400000" algn="ctr" rotWithShape="0">
+              <a:srgbClr val="000000">
+                <a:alpha val="63000"/>
+              </a:srgbClr>
+            </a:outerShdw>
+          </a:effectLst>
+        </a:effectStyle>
+      </a:effectStyleLst>
+      <a:bgFillStyleLst>
+        <a:solidFill>
+          <a:schemeClr val="phClr"/>
+        </a:solidFill>
+        <a:solidFill>
+          <a:schemeClr val="phClr">
+            <a:tint val="95000"/>
+            <a:satMod val="170000"/>
+          </a:schemeClr>
+        </a:solidFill>
+        <a:gradFill rotWithShape="1">
+          <a:gsLst>
+            <a:gs pos="0">
+              <a:schemeClr val="phClr">
+                <a:tint val="93000"/>
+                <a:satMod val="150000"/>
+                <a:shade val="98000"/>
+                <a:lumMod val="102000"/>
+              </a:schemeClr>
+            </a:gs>
+            <a:gs pos="50000">
+              <a:schemeClr val="phClr">
+                <a:tint val="98000"/>
+                <a:satMod val="130000"/>
+                <a:shade val="90000"/>
+                <a:lumMod val="103000"/>
+              </a:schemeClr>
+            </a:gs>
+            <a:gs pos="100000">
+              <a:schemeClr val="phClr">
+                <a:shade val="63000"/>
+                <a:satMod val="120000"/>
+              </a:schemeClr>
+            </a:gs>
+          </a:gsLst>
+          <a:lin ang="5400000" scaled="0"/>
+        </a:gradFill>
+      </a:bgFillStyleLst>
+    </a:fmtScheme>
+  </a:themeElements>
+  <a:objectDefaults>
+    <a:lnDef>
+      <a:spPr/>
+      <a:bodyPr/>
+      <a:lstStyle/>
+      <a:style>
+        <a:lnRef idx="2">
+          <a:schemeClr val="accent1"/>
+        </a:lnRef>
+        <a:fillRef idx="0">
+          <a:schemeClr val="accent1"/>
+        </a:fillRef>
+        <a:effectRef idx="1">
+          <a:schemeClr val="accent1"/>
+        </a:effectRef>
+        <a:fontRef idx="minor">
+          <a:schemeClr val="tx1"/>
+        </a:fontRef>
+      </a:style>
+    </a:lnDef>
+  </a:objectDefaults>
+  <a:extraClrSchemeLst/>
+  <a:extLst>
+    <a:ext uri="{05A4C25C-085E-4340-85A3-A5531E510DB2}">
+      <thm15:themeFamily xmlns:thm15="http://schemas.microsoft.com/office/thememl/2012/main" name="Office Theme" id="{2E142A2C-CD16-42D6-873A-C26D2A0506FA}" vid="{1BDDFF52-6CD6-40A5-AB3C-68EB2F1E4D0A}"/>
+    </a:ext>
+  </a:extLst>
+</a:theme>
 </file>